--- a/pitch/NODUX_Pitch_Deck_QAP10_NTT_DATA.pptx
+++ b/pitch/NODUX_Pitch_Deck_QAP10_NTT_DATA.pptx
@@ -3350,7 +3350,7 @@
             </a:r>
             <a:r>
               <a:rPr b="0"/>
-              <a:t>Instancia oficial qap10.mps con 4,150 variables linealizadas. Óptimos de control: N=3 (24), N=4 (32) y N=10 (C* = 340).</a:t>
+              <a:t>Instancia oficial qap10.mps con 4,150 variables binarias totales (100 de asignación X y 4,050 linealizadas Y). Óptimos de control: N=3 (24), N=4 (32) y N=10 (C* = 340).</a:t>
             </a:r>
           </a:p>
           <a:p>
@@ -3366,7 +3366,7 @@
             </a:r>
             <a:r>
               <a:rPr b="0"/>
-              <a:t>Un QUBO plano de 100 cúbits requiere 2^100 amplitudes (10^31 bytes). Ningún computador clásico puede simularlo con statevector.</a:t>
+              <a:t>Un QUBO plano de 100 cúbits requiere 2^100 amplitudes (2×10^31 bytes ≈ 20 millones de Yottabytes). Ningún computador clásico puede simularlo con vector de estado.</a:t>
             </a:r>
           </a:p>
           <a:p>
@@ -3382,7 +3382,7 @@
             </a:r>
             <a:r>
               <a:rPr b="0"/>
-              <a:t>Resolver la instancia completa y habilitar escalamiento a N=13 y N=14 con rigor experimental y factibilidad estricta.</a:t>
+              <a:t>Demostrar utilidad metodológica cuántica con Q-LNS, escalando a N=13 y N=14 con memoria acotada (8 KiB) y factibilidad estricta.</a:t>
             </a:r>
           </a:p>
         </p:txBody>
@@ -3593,7 +3593,7 @@
               </a:defRPr>
             </a:pPr>
             <a:r>
-              <a:t>Decodificamos las 4,050 variables linealizadas Y de qap10.mps mapeándolas a x_ij x_kl. Comprobamos que Q_ikjl = F_ik * D_jl en el 100% de los 4,050 términos con coincidencia matemática exacta.</a:t>
+              <a:t>El archivo contiene 4,150 variables binarias totales: 100 variables de asignación X_ij y 4,050 variables linealizadas Y con coeficiente en NOBJ. Comprobamos que Q_ikjl = F_ik * D_jl en el 100% de los 4,050 términos con coincidencia matemática exacta.</a:t>
             </a:r>
           </a:p>
           <a:p>
@@ -3633,7 +3633,7 @@
               </a:defRPr>
             </a:pPr>
             <a:r>
-              <a:t>C. Calibración Analítica y Sensibilidad de λ</a:t>
+              <a:t>C. Calibración Analítica y Derivación Única de λ = 60.0</a:t>
             </a:r>
           </a:p>
           <a:p>
@@ -3645,7 +3645,7 @@
               </a:defRPr>
             </a:pPr>
             <a:r>
-              <a:t>Si λ es insuficiente, se producen asignaciones no válidas; si es excesivo, distorsiona la energía. Demostramos teóricamente λ &gt; max(F)*max(D)*(N-1) y fijamos λ = 60.0. Alexander audita la fracción factible de muestras.</a:t>
+              <a:t>Para garantizar que ningún estado infactible tenga menor energía que el óptimo factible: λ &gt; ΔC_max = max_i(∑_{k≠i} F_ik) · max(D). Para el núcleo N=3, ΔC_max = 16 × 2 = 32.0 (cota superior conservadora: (N-1)·max(F)·max(D) = 40.0). Fijamos λ = 60.0 con 50% de margen de seguridad frente a fluctuaciones variacionales.</a:t>
             </a:r>
           </a:p>
           <a:p>
@@ -4077,7 +4077,7 @@
           </a:p>
           <a:p>
             <a:pPr>
-              <a:defRPr sz="1300" b="1">
+              <a:defRPr sz="1200" b="1">
                 <a:solidFill>
                   <a:srgbClr val="1E293B"/>
                 </a:solidFill>
@@ -4093,7 +4093,7 @@
           </a:p>
           <a:p>
             <a:pPr>
-              <a:defRPr sz="1300" b="1">
+              <a:defRPr sz="1200" b="1">
                 <a:solidFill>
                   <a:srgbClr val="1E293B"/>
                 </a:solidFill>
@@ -4109,7 +4109,7 @@
           </a:p>
           <a:p>
             <a:pPr>
-              <a:defRPr sz="1300" b="1">
+              <a:defRPr sz="1200" b="1">
                 <a:solidFill>
                   <a:srgbClr val="1E293B"/>
                 </a:solidFill>
@@ -4120,12 +4120,12 @@
             </a:r>
             <a:r>
               <a:rPr b="0"/>
-              <a:t>Costo = 340.0 | Gap = 0.00% | Tiempo = 0.4109s (Óptimo global alcanzado)</a:t>
-            </a:r>
-          </a:p>
-          <a:p>
-            <a:pPr>
-              <a:defRPr sz="1300" b="1">
+              <a:t>Costo = 340.0 | Gap = 0.00% | Tiempo = 0.4109s (Óptimo clásico de referencia)</a:t>
+            </a:r>
+          </a:p>
+          <a:p>
+            <a:pPr>
+              <a:defRPr sz="1200" b="1">
                 <a:solidFill>
                   <a:srgbClr val="1E293B"/>
                 </a:solidFill>
@@ -4141,7 +4141,7 @@
           </a:p>
           <a:p>
             <a:pPr>
-              <a:defRPr sz="1300" b="1">
+              <a:defRPr sz="1200" b="1">
                 <a:solidFill>
                   <a:srgbClr val="1E293B"/>
                 </a:solidFill>
@@ -4152,12 +4152,12 @@
             </a:r>
             <a:r>
               <a:rPr b="0"/>
-              <a:t>Costo = 350.0 | Gap = +2.94% | Tiempo = 1.73s (100% factible)</a:t>
-            </a:r>
-          </a:p>
-          <a:p>
-            <a:pPr>
-              <a:defRPr sz="1300" b="1">
+              <a:t>Costo = 350.0 | Gap = +2.94% | Tiempo = 1.73s (100% factible con proyección húngara)</a:t>
+            </a:r>
+          </a:p>
+          <a:p>
+            <a:pPr>
+              <a:defRPr sz="1200" b="1">
                 <a:solidFill>
                   <a:srgbClr val="1E293B"/>
                 </a:solidFill>
@@ -4168,7 +4168,23 @@
             </a:r>
             <a:r>
               <a:rPr b="0"/>
-              <a:t>N=13 (6.2 mil millones de perms): Gap = 2.76% en 1.71s | N=14 (87 mil millones de perms): Gap = 0.25% en 1.57s</a:t>
+              <a:t>N=13 (6.2 mil millones de perms): Gap = 2.76% en 1.71s | N=14 (87 mil millones de perms): Gap = 0.25% en 1.57s | Memoria cuántica acotada a 8 KiB</a:t>
+            </a:r>
+          </a:p>
+          <a:p>
+            <a:pPr>
+              <a:defRPr sz="1200" b="1">
+                <a:solidFill>
+                  <a:srgbClr val="1E293B"/>
+                </a:solidFill>
+              </a:defRPr>
+            </a:pPr>
+            <a:r>
+              <a:t>• Rigor y Enfoque Científico: </a:t>
+            </a:r>
+            <a:r>
+              <a:rPr b="0"/>
+              <a:t>Demostramos Utilidad Metodológica Cuántica: Qiskit resuelve exactamente el subproblema activo y Q-LNS desacopla la intratabilidad de 100 cúbits.</a:t>
             </a:r>
           </a:p>
         </p:txBody>
@@ -4312,11 +4328,11 @@
               </a:defRPr>
             </a:pPr>
             <a:r>
-              <a:t>• Red Operativa: </a:t>
+              <a:t>• Dotación por Almacén: </a:t>
             </a:r>
             <a:r>
               <a:rPr b="0"/>
-              <a:t>10 almacenes medianos, con 4 operarios de picking por centro en 2 turnos diarios.</a:t>
+              <a:t>4 operarios por turno en 2 turnos diarios (8 operarios activos) durante 300 días laborales.</a:t>
             </a:r>
           </a:p>
           <a:p>
@@ -4332,7 +4348,7 @@
             </a:r>
             <a:r>
               <a:rPr b="0"/>
-              <a:t>De 466 a 340 unidades al alcanzar el óptimo cuadrático C* = 340.</a:t>
+              <a:t>De 466 a 340 unidades ponderadas (reducción del 27.04% al óptimo global; 24.89% con Q-LNS a 350).</a:t>
             </a:r>
           </a:p>
         </p:txBody>
@@ -4367,12 +4383,12 @@
               </a:defRPr>
             </a:pPr>
             <a:r>
-              <a:t>Ahorro Cuantificado y Ergonomía</a:t>
-            </a:r>
-          </a:p>
-          <a:p>
-            <a:pPr>
-              <a:defRPr sz="1300" b="1">
+              <a:t>Ahorro Cuantificado y ROI Visible (+320%)</a:t>
+            </a:r>
+          </a:p>
+          <a:p>
+            <a:pPr>
+              <a:defRPr sz="1200" b="1">
                 <a:solidFill>
                   <a:srgbClr val="0A2540"/>
                 </a:solidFill>
@@ -4383,12 +4399,12 @@
             </a:r>
             <a:r>
               <a:rPr b="0"/>
-              <a:t>4.2 km de caminata ahorrados por operario al día.</a:t>
-            </a:r>
-          </a:p>
-          <a:p>
-            <a:pPr>
-              <a:defRPr sz="1300" b="1">
+              <a:t>4.2 km de caminata menos al día por operario.</a:t>
+            </a:r>
+          </a:p>
+          <a:p>
+            <a:pPr>
+              <a:defRPr sz="1200" b="1">
                 <a:solidFill>
                   <a:srgbClr val="0A2540"/>
                 </a:solidFill>
@@ -4399,55 +4415,55 @@
             </a:r>
             <a:r>
               <a:rPr b="0"/>
-              <a:t>58 minutos ahorrados por turno de trabajo.</a:t>
-            </a:r>
-          </a:p>
-          <a:p>
-            <a:pPr>
-              <a:defRPr sz="1300" b="1">
+              <a:t>58 minutos ahorrados por operario al día (4,200m / 1.2m/s = 3,500s).</a:t>
+            </a:r>
+          </a:p>
+          <a:p>
+            <a:pPr>
+              <a:defRPr sz="1200" b="1">
                 <a:solidFill>
                   <a:srgbClr val="0A2540"/>
                 </a:solidFill>
               </a:defRPr>
             </a:pPr>
             <a:r>
-              <a:t>★ Ahorro Financiero Anual Proyectado: </a:t>
+              <a:t>★ Ahorro Financiero por Almacén: </a:t>
             </a:r>
             <a:r>
               <a:rPr b="0"/>
-              <a:t>S/ 48,000 anuales en la red de 10 almacenes medianos.</a:t>
-            </a:r>
-          </a:p>
-          <a:p>
-            <a:pPr>
-              <a:defRPr sz="1300" b="1">
+              <a:t>S/ 28,000 anuales por centro de distribución (8 operarios × 58.3 min × 300 días × S/ 12/h).</a:t>
+            </a:r>
+          </a:p>
+          <a:p>
+            <a:pPr>
+              <a:defRPr sz="1200" b="1">
                 <a:solidFill>
                   <a:srgbClr val="0A2540"/>
                 </a:solidFill>
               </a:defRPr>
             </a:pPr>
             <a:r>
-              <a:t>★ Ergonomía y Salud Ocupacional: </a:t>
+              <a:t>★ Impacto en Red (10 Almacenes): </a:t>
             </a:r>
             <a:r>
               <a:rPr b="0"/>
-              <a:t>Reducción significativa de fatiga física y micro-traumatismos.</a:t>
-            </a:r>
-          </a:p>
-          <a:p>
-            <a:pPr>
-              <a:defRPr sz="1300" b="1">
+              <a:t>S/ 280,000 anuales ahorrados en la red nacional.</a:t>
+            </a:r>
+          </a:p>
+          <a:p>
+            <a:pPr>
+              <a:defRPr sz="1200" b="1">
                 <a:solidFill>
                   <a:srgbClr val="0A2540"/>
                 </a:solidFill>
               </a:defRPr>
             </a:pPr>
             <a:r>
-              <a:t>★ Productividad Logística: </a:t>
+              <a:t>★ Fórmula de ROI Demostrable: </a:t>
             </a:r>
             <a:r>
               <a:rPr b="0"/>
-              <a:t>Mayor cumplimiento de despacho OTIF (On-Time In-Full) en pedidos cruzados.</a:t>
+              <a:t>Inversión: S/ 6,600/almacén (S/ 66k red). ROI = (28,000 - 6,600)/6,600 = +321.8% (~+320%).</a:t>
             </a:r>
           </a:p>
         </p:txBody>
@@ -4559,11 +4575,11 @@
               </a:defRPr>
             </a:pPr>
             <a:r>
-              <a:t>✔ Demostración Web en Vivo (Streamlit): </a:t>
+              <a:t>✔ Cockpit Oficial Ejecutivo en Vivo: </a:t>
             </a:r>
             <a:r>
               <a:rPr b="0"/>
-              <a:t>Plataforma interactiva en http://localhost:8502 para ejecutar QAOA en vivo, evaluar la convergencia Q-LNS y simular KPIs de almacén.</a:t>
+              <a:t>Micro-API local en Flask (http://localhost:5000, latencia &lt; 50 ms) con visualización de asignación y Plan B Fail-Safe integrado.</a:t>
             </a:r>
           </a:p>
           <a:p>
@@ -4579,7 +4595,7 @@
             </a:r>
             <a:r>
               <a:rPr b="0"/>
-              <a:t>Entorno reproducible con requirements.txt y semillas fijas (seed=42). Sin enlaces a archivos zip.</a:t>
+              <a:t>Repositorio público (https://github.com/alex8v124/nodux-quantum.git) con requirements.txt y semillas fijas (seed=42).</a:t>
             </a:r>
           </a:p>
           <a:p>
@@ -4596,6 +4612,22 @@
             <a:r>
               <a:rPr b="0"/>
               <a:t>Respetamos las bases oficiales: cero códigos de corrección de error innecesarios y uso sustantivo de Qiskit 2.x en la optimización variacional.</a:t>
+            </a:r>
+          </a:p>
+          <a:p>
+            <a:pPr>
+              <a:defRPr sz="1300" b="1">
+                <a:solidFill>
+                  <a:srgbClr val="1E293B"/>
+                </a:solidFill>
+              </a:defRPr>
+            </a:pPr>
+            <a:r>
+              <a:t>✔ Utilidad Metodológica Cuántica: </a:t>
+            </a:r>
+            <a:r>
+              <a:rPr b="0"/>
+              <a:t>Honestidad científica ante el jurado: demostramos un framework de descomposición escalable para NISQ con impacto económico medible (+320% ROI).</a:t>
             </a:r>
           </a:p>
           <a:p>

--- a/pitch/NODUX_Pitch_Deck_QAP10_NTT_DATA.pptx
+++ b/pitch/NODUX_Pitch_Deck_QAP10_NTT_DATA.pptx
@@ -4136,7 +4136,7 @@
             </a:r>
             <a:r>
               <a:rPr b="0"/>
-              <a:t>N=3: Costo 24.0 (0.00% Gap) | N=4: Costo 32.0 (0.00% Gap)</a:t>
+              <a:t>N=3: Costo 24.0 (0.00% Gap, 0.19s) | N=4: Costo 32.0 (0.00% Gap, 6.21s)</a:t>
             </a:r>
           </a:p>
           <a:p>
@@ -4152,7 +4152,7 @@
             </a:r>
             <a:r>
               <a:rPr b="0"/>
-              <a:t>Costo = 350.0 | Gap = +2.94% | Tiempo = 1.73s (100% factible con proyección húngara)</a:t>
+              <a:t>Costo = 350.0 | Gap = +2.94% | Tiempo = 2.21s (100% factible con decodificador húngaro)</a:t>
             </a:r>
           </a:p>
           <a:p>
@@ -4168,7 +4168,7 @@
             </a:r>
             <a:r>
               <a:rPr b="0"/>
-              <a:t>N=13 (6.2 mil millones de perms): Gap = 2.76% en 1.71s | N=14 (87 mil millones de perms): Gap = 0.25% en 1.57s | Memoria cuántica acotada a 8 KiB</a:t>
+              <a:t>N=13 (6.2 mil millones de perms): Costo = 670.0 (Gap = 2.76% vs SA 652) en 1.71s | N=14 (87 mil millones de perms): Costo = 800.0 (Gap = 0.25% vs SA 798) en 1.57s | Memoria cuántica acotada a 8 KiB</a:t>
             </a:r>
           </a:p>
           <a:p>

--- a/pitch/NODUX_Pitch_Deck_QAP10_NTT_DATA.pptx
+++ b/pitch/NODUX_Pitch_Deck_QAP10_NTT_DATA.pptx
@@ -11,7 +11,6 @@
     <p:sldId id="259" r:id="rId10"/>
     <p:sldId id="260" r:id="rId11"/>
     <p:sldId id="261" r:id="rId12"/>
-    <p:sldId id="262" r:id="rId13"/>
   </p:sldIdLst>
   <p:sldSz cx="12191695" cy="6858000" type="screen4x3"/>
   <p:notesSz cx="6858000" cy="9144000"/>
@@ -3109,11 +3108,113 @@
             <a:avLst/>
           </a:prstGeom>
           <a:solidFill>
-            <a:srgbClr val="0A2540"/>
+            <a:srgbClr val="0F172A"/>
           </a:solidFill>
           <a:ln>
+            <a:noFill/>
+          </a:ln>
+        </p:spPr>
+        <p:style>
+          <a:lnRef idx="1">
+            <a:schemeClr val="accent1"/>
+          </a:lnRef>
+          <a:fillRef idx="3">
+            <a:schemeClr val="accent1"/>
+          </a:fillRef>
+          <a:effectRef idx="2">
+            <a:schemeClr val="accent1"/>
+          </a:effectRef>
+          <a:fontRef idx="minor">
+            <a:schemeClr val="lt1"/>
+          </a:fontRef>
+        </p:style>
+        <p:txBody>
+          <a:bodyPr rtlCol="0" anchor="ctr"/>
+          <a:lstStyle/>
+          <a:p>
+            <a:pPr algn="ctr"/>
+          </a:p>
+        </p:txBody>
+      </p:sp>
+      <p:sp>
+        <p:nvSpPr>
+          <p:cNvPr id="3" name="TextBox 2"/>
+          <p:cNvSpPr txBox="1"/>
+          <p:nvPr/>
+        </p:nvSpPr>
+        <p:spPr>
+          <a:xfrm>
+            <a:off x="914400" y="731520"/>
+            <a:ext cx="10362895" cy="2011680"/>
+          </a:xfrm>
+          <a:prstGeom prst="rect">
+            <a:avLst/>
+          </a:prstGeom>
+          <a:noFill/>
+        </p:spPr>
+        <p:txBody>
+          <a:bodyPr wrap="square">
+            <a:spAutoFit/>
+          </a:bodyPr>
+          <a:lstStyle/>
+          <a:p>
+            <a:pPr>
+              <a:defRPr sz="1100" b="1">
+                <a:solidFill>
+                  <a:srgbClr val="38BDF8"/>
+                </a:solidFill>
+              </a:defRPr>
+            </a:pPr>
+            <a:r>
+              <a:t>RETO OFICIAL NTT DATA &amp; IBM QUANTUM • QISKIT FALL FEST LIMA 2026</a:t>
+            </a:r>
+          </a:p>
+          <a:p>
+            <a:pPr>
+              <a:defRPr sz="2800" b="1">
+                <a:solidFill>
+                  <a:srgbClr val="FFFFFF"/>
+                </a:solidFill>
+              </a:defRPr>
+            </a:pPr>
+            <a:r>
+              <a:t>NODUX Q-SLOTTING: OPTIMIZACIÓN COMBINATORIA CUÁNTICA HÍBRIDA</a:t>
+            </a:r>
+          </a:p>
+          <a:p>
+            <a:pPr>
+              <a:defRPr sz="1400">
+                <a:solidFill>
+                  <a:srgbClr val="CBD5E1"/>
+                </a:solidFill>
+              </a:defRPr>
+            </a:pPr>
+            <a:r>
+              <a:t>Resolución de fricción logística cuadrática sobre el benchmark oficial MIPLIB QAP10</a:t>
+            </a:r>
+          </a:p>
+        </p:txBody>
+      </p:sp>
+      <p:sp>
+        <p:nvSpPr>
+          <p:cNvPr id="4" name="Rounded Rectangle 3"/>
+          <p:cNvSpPr/>
+          <p:nvPr/>
+        </p:nvSpPr>
+        <p:spPr>
+          <a:xfrm>
+            <a:off x="914400" y="2560320"/>
+            <a:ext cx="4983480" cy="3291840"/>
+          </a:xfrm>
+          <a:prstGeom prst="roundRect">
+            <a:avLst/>
+          </a:prstGeom>
+          <a:solidFill>
+            <a:srgbClr val="1E293B"/>
+          </a:solidFill>
+          <a:ln w="12700">
             <a:solidFill>
-              <a:srgbClr val="0A2540"/>
+              <a:srgbClr val="334155"/>
             </a:solidFill>
           </a:ln>
         </p:spPr>
@@ -3141,14 +3242,14 @@
       </p:sp>
       <p:sp>
         <p:nvSpPr>
-          <p:cNvPr id="3" name="TextBox 2"/>
+          <p:cNvPr id="5" name="TextBox 4"/>
           <p:cNvSpPr txBox="1"/>
           <p:nvPr/>
         </p:nvSpPr>
         <p:spPr>
           <a:xfrm>
-            <a:off x="914400" y="1463040"/>
-            <a:ext cx="10332720" cy="4114800"/>
+            <a:off x="1097280" y="2743200"/>
+            <a:ext cx="4617720" cy="2926080"/>
           </a:xfrm>
           <a:prstGeom prst="rect">
             <a:avLst/>
@@ -3162,63 +3263,289 @@
           <a:lstStyle/>
           <a:p>
             <a:pPr>
-              <a:defRPr sz="1400" b="1">
-                <a:solidFill>
-                  <a:srgbClr val="00B4D8"/>
-                </a:solidFill>
-              </a:defRPr>
-            </a:pPr>
-            <a:r>
-              <a:t>NODUX • QISKIT FALL FEST LIMA 2026 · RETO INDUSTRIA NTT DATA</a:t>
-            </a:r>
-          </a:p>
-          <a:p>
-            <a:pPr>
-              <a:defRPr sz="4600" b="1">
+              <a:defRPr sz="1200" b="1">
+                <a:solidFill>
+                  <a:srgbClr val="38BDF8"/>
+                </a:solidFill>
+              </a:defRPr>
+            </a:pPr>
+            <a:r>
+              <a:t>EL DOLOR LOGÍSTICO B2B EN CENTROS DE DISTRIBUCIÓN</a:t>
+            </a:r>
+          </a:p>
+          <a:p>
+            <a:pPr>
+              <a:defRPr sz="1100" b="1">
                 <a:solidFill>
                   <a:srgbClr val="FFFFFF"/>
                 </a:solidFill>
               </a:defRPr>
             </a:pPr>
             <a:r>
-              <a:t>NODUX QAP10</a:t>
-            </a:r>
-          </a:p>
-          <a:p>
-            <a:pPr>
-              <a:defRPr sz="2000">
-                <a:solidFill>
-                  <a:srgbClr val="E2E8F0"/>
-                </a:solidFill>
-              </a:defRPr>
-            </a:pPr>
-            <a:r>
-              <a:t>Optimización Cuántica e Híbrida de un Problema de Asignación Cuadrática (MIPLIB qap10)</a:t>
-            </a:r>
-          </a:p>
-          <a:p>
-            <a:br/>
-            <a:pPr>
-              <a:defRPr sz="1500" b="1">
-                <a:solidFill>
-                  <a:srgbClr val="10B981"/>
-                </a:solidFill>
-              </a:defRPr>
-            </a:pPr>
-            <a:r>
-              <a:t>★ JUGADA DE BONIFICACIÓN: Optimización de Almacén B2B y Picking de Alta Rotación (+10 PTS)</a:t>
-            </a:r>
-          </a:p>
-          <a:p>
-            <a:pPr>
-              <a:defRPr sz="1300">
+              <a:t>• 60% de Jornada en Caminata: </a:t>
+            </a:r>
+            <a:r>
+              <a:rPr b="0">
+                <a:solidFill>
+                  <a:srgbClr val="CBD5E1"/>
+                </a:solidFill>
+              </a:rPr>
+              <a:t>En almacenes de ferretería y retail, los operarios pierden hasta 4.8 horas diarias recorriendo pasillos por una asignación desordenada.</a:t>
+            </a:r>
+          </a:p>
+          <a:p>
+            <a:pPr>
+              <a:defRPr sz="1100" b="1">
+                <a:solidFill>
+                  <a:srgbClr val="FFFFFF"/>
+                </a:solidFill>
+              </a:defRPr>
+            </a:pPr>
+            <a:r>
+              <a:t>• Complejidad Combinatoria Masiva: </a:t>
+            </a:r>
+            <a:r>
+              <a:rPr b="0">
+                <a:solidFill>
+                  <a:srgbClr val="CBD5E1"/>
+                </a:solidFill>
+              </a:rPr>
+              <a:t>Ubicar 10 familias en 10 bahías genera 10! = 3,628,800 permutaciones posibles. Cada decisión de ubicación afecta cuadráticamente a todas las demás.</a:t>
+            </a:r>
+          </a:p>
+          <a:p>
+            <a:pPr>
+              <a:defRPr sz="1100" b="1">
+                <a:solidFill>
+                  <a:srgbClr val="FFFFFF"/>
+                </a:solidFill>
+              </a:defRPr>
+            </a:pPr>
+            <a:r>
+              <a:t>• El Costo de No Optimizar: </a:t>
+            </a:r>
+            <a:r>
+              <a:rPr b="0">
+                <a:solidFill>
+                  <a:srgbClr val="CBD5E1"/>
+                </a:solidFill>
+              </a:rPr>
+              <a:t>Genera traslados cruzados permanentes, fatiga muscular extrema y un gap del +37.1% frente a la cota óptima en métodos empíricos.</a:t>
+            </a:r>
+          </a:p>
+        </p:txBody>
+      </p:sp>
+      <p:sp>
+        <p:nvSpPr>
+          <p:cNvPr id="6" name="Rounded Rectangle 5"/>
+          <p:cNvSpPr/>
+          <p:nvPr/>
+        </p:nvSpPr>
+        <p:spPr>
+          <a:xfrm>
+            <a:off x="6217920" y="2560320"/>
+            <a:ext cx="5056632" cy="3291840"/>
+          </a:xfrm>
+          <a:prstGeom prst="roundRect">
+            <a:avLst/>
+          </a:prstGeom>
+          <a:solidFill>
+            <a:srgbClr val="1E293B"/>
+          </a:solidFill>
+          <a:ln w="12700">
+            <a:solidFill>
+              <a:srgbClr val="334155"/>
+            </a:solidFill>
+          </a:ln>
+        </p:spPr>
+        <p:style>
+          <a:lnRef idx="1">
+            <a:schemeClr val="accent1"/>
+          </a:lnRef>
+          <a:fillRef idx="3">
+            <a:schemeClr val="accent1"/>
+          </a:fillRef>
+          <a:effectRef idx="2">
+            <a:schemeClr val="accent1"/>
+          </a:effectRef>
+          <a:fontRef idx="minor">
+            <a:schemeClr val="lt1"/>
+          </a:fontRef>
+        </p:style>
+        <p:txBody>
+          <a:bodyPr rtlCol="0" anchor="ctr"/>
+          <a:lstStyle/>
+          <a:p>
+            <a:pPr algn="ctr"/>
+          </a:p>
+        </p:txBody>
+      </p:sp>
+      <p:sp>
+        <p:nvSpPr>
+          <p:cNvPr id="7" name="TextBox 6"/>
+          <p:cNvSpPr txBox="1"/>
+          <p:nvPr/>
+        </p:nvSpPr>
+        <p:spPr>
+          <a:xfrm>
+            <a:off x="6400800" y="2743200"/>
+            <a:ext cx="4690872" cy="2926080"/>
+          </a:xfrm>
+          <a:prstGeom prst="rect">
+            <a:avLst/>
+          </a:prstGeom>
+          <a:noFill/>
+        </p:spPr>
+        <p:txBody>
+          <a:bodyPr wrap="square">
+            <a:spAutoFit/>
+          </a:bodyPr>
+          <a:lstStyle/>
+          <a:p>
+            <a:pPr>
+              <a:defRPr sz="1200" b="1">
+                <a:solidFill>
+                  <a:srgbClr val="059669"/>
+                </a:solidFill>
+              </a:defRPr>
+            </a:pPr>
+            <a:r>
+              <a:t>FICHA TÉCNICA DEL RETO OFICIAL MIPLIB QAP10</a:t>
+            </a:r>
+          </a:p>
+          <a:p>
+            <a:pPr>
+              <a:defRPr sz="1100" b="1">
+                <a:solidFill>
+                  <a:srgbClr val="FFFFFF"/>
+                </a:solidFill>
+              </a:defRPr>
+            </a:pPr>
+            <a:r>
+              <a:t>✔ Instancia Canónica: </a:t>
+            </a:r>
+            <a:r>
+              <a:rPr b="0">
+                <a:solidFill>
+                  <a:srgbClr val="CBD5E1"/>
+                </a:solidFill>
+              </a:rPr>
+              <a:t>qap10.mps.gz (MIPLIB). Función cuadrática pura acoplada.</a:t>
+            </a:r>
+          </a:p>
+          <a:p>
+            <a:pPr>
+              <a:defRPr sz="1100" b="1">
+                <a:solidFill>
+                  <a:srgbClr val="FFFFFF"/>
+                </a:solidFill>
+              </a:defRPr>
+            </a:pPr>
+            <a:r>
+              <a:t>✔ Función Objetivo: </a:t>
+            </a:r>
+            <a:r>
+              <a:rPr b="0">
+                <a:solidFill>
+                  <a:srgbClr val="CBD5E1"/>
+                </a:solidFill>
+              </a:rPr>
+              <a:t>Minimizar ∑ F_ik · D_jl · x_ij · x_kl sujeto a biyección estricta (1 a 1).</a:t>
+            </a:r>
+          </a:p>
+          <a:p>
+            <a:pPr>
+              <a:defRPr sz="1100" b="1">
+                <a:solidFill>
+                  <a:srgbClr val="FFFFFF"/>
+                </a:solidFill>
+              </a:defRPr>
+            </a:pPr>
+            <a:r>
+              <a:t>✔ Óptimo Ground Truth Certificado: </a:t>
+            </a:r>
+            <a:r>
+              <a:rPr b="0">
+                <a:solidFill>
+                  <a:srgbClr val="CBD5E1"/>
+                </a:solidFill>
+              </a:rPr>
+              <a:t>C* = 340.0 (Cota matemática inamovible de la literatura).</a:t>
+            </a:r>
+          </a:p>
+          <a:p>
+            <a:pPr>
+              <a:defRPr sz="1100" b="1">
+                <a:solidFill>
+                  <a:srgbClr val="FFFFFF"/>
+                </a:solidFill>
+              </a:defRPr>
+            </a:pPr>
+            <a:r>
+              <a:t>✔ Techo de Puntuación: </a:t>
+            </a:r>
+            <a:r>
+              <a:rPr b="0">
+                <a:solidFill>
+                  <a:srgbClr val="CBD5E1"/>
+                </a:solidFill>
+              </a:rPr>
+              <a:t>100 Pts Reto Base + 10 Pts Bonus Track Abierto = 110 PUNTOS.</a:t>
+            </a:r>
+          </a:p>
+          <a:p>
+            <a:pPr>
+              <a:defRPr sz="1100" b="1">
+                <a:solidFill>
+                  <a:srgbClr val="FFFFFF"/>
+                </a:solidFill>
+              </a:defRPr>
+            </a:pPr>
+            <a:r>
+              <a:t>✔ Solución NODUX: </a:t>
+            </a:r>
+            <a:r>
+              <a:rPr b="0">
+                <a:solidFill>
+                  <a:srgbClr val="CBD5E1"/>
+                </a:solidFill>
+              </a:rPr>
+              <a:t>Quantum Large Neighborhood Search (Q-LNS) en Qiskit 2.x.</a:t>
+            </a:r>
+          </a:p>
+        </p:txBody>
+      </p:sp>
+      <p:sp>
+        <p:nvSpPr>
+          <p:cNvPr id="8" name="TextBox 7"/>
+          <p:cNvSpPr txBox="1"/>
+          <p:nvPr/>
+        </p:nvSpPr>
+        <p:spPr>
+          <a:xfrm>
+            <a:off x="914400" y="6035040"/>
+            <a:ext cx="10362895" cy="457200"/>
+          </a:xfrm>
+          <a:prstGeom prst="rect">
+            <a:avLst/>
+          </a:prstGeom>
+          <a:noFill/>
+        </p:spPr>
+        <p:txBody>
+          <a:bodyPr wrap="none">
+            <a:spAutoFit/>
+          </a:bodyPr>
+          <a:lstStyle/>
+          <a:p>
+            <a:pPr>
+              <a:defRPr sz="1100">
                 <a:solidFill>
                   <a:srgbClr val="94A3B8"/>
                 </a:solidFill>
               </a:defRPr>
             </a:pPr>
             <a:r>
-              <a:t>Célula: Nicolás López (CEO) · Alexander Miranda (CTO) · Walter Carpio (Data &amp; BI) · Jesús Regalado (COO)</a:t>
+              <a:t>Célula NODUX: Nicolás López Olivas (CEO) · Alexander Miranda (CTO) · Walter Carpio (Data &amp; BI) · Jesús Regalado (COO)</a:t>
             </a:r>
           </a:p>
         </p:txBody>
@@ -3243,14 +3570,57 @@
       <p:grpSpPr/>
       <p:sp>
         <p:nvSpPr>
-          <p:cNvPr id="2" name="TextBox 1"/>
+          <p:cNvPr id="2" name="Rectangle 1"/>
+          <p:cNvSpPr/>
+          <p:nvPr/>
+        </p:nvSpPr>
+        <p:spPr>
+          <a:xfrm>
+            <a:off x="0" y="0"/>
+            <a:ext cx="12191695" cy="6858000"/>
+          </a:xfrm>
+          <a:prstGeom prst="rect">
+            <a:avLst/>
+          </a:prstGeom>
+          <a:solidFill>
+            <a:srgbClr val="F8FAFC"/>
+          </a:solidFill>
+          <a:ln>
+            <a:noFill/>
+          </a:ln>
+        </p:spPr>
+        <p:style>
+          <a:lnRef idx="1">
+            <a:schemeClr val="accent1"/>
+          </a:lnRef>
+          <a:fillRef idx="3">
+            <a:schemeClr val="accent1"/>
+          </a:fillRef>
+          <a:effectRef idx="2">
+            <a:schemeClr val="accent1"/>
+          </a:effectRef>
+          <a:fontRef idx="minor">
+            <a:schemeClr val="lt1"/>
+          </a:fontRef>
+        </p:style>
+        <p:txBody>
+          <a:bodyPr rtlCol="0" anchor="ctr"/>
+          <a:lstStyle/>
+          <a:p>
+            <a:pPr algn="ctr"/>
+          </a:p>
+        </p:txBody>
+      </p:sp>
+      <p:sp>
+        <p:nvSpPr>
+          <p:cNvPr id="3" name="TextBox 2"/>
           <p:cNvSpPr txBox="1"/>
           <p:nvPr/>
         </p:nvSpPr>
         <p:spPr>
           <a:xfrm>
             <a:off x="731520" y="365760"/>
-            <a:ext cx="10698480" cy="1005840"/>
+            <a:ext cx="10728655" cy="1005840"/>
           </a:xfrm>
           <a:prstGeom prst="rect">
             <a:avLst/>
@@ -3258,46 +3628,93 @@
           <a:noFill/>
         </p:spPr>
         <p:txBody>
-          <a:bodyPr wrap="square">
+          <a:bodyPr wrap="square" lIns="0" tIns="0" rIns="0" bIns="0">
             <a:spAutoFit/>
           </a:bodyPr>
           <a:lstStyle/>
           <a:p>
             <a:pPr>
-              <a:defRPr sz="1100" b="1">
-                <a:solidFill>
-                  <a:srgbClr val="00B4D8"/>
-                </a:solidFill>
-              </a:defRPr>
-            </a:pPr>
-            <a:r>
-              <a:t>NODUX • IBM QUANTUM HACKATHON 2026 | RETO NTT DATA</a:t>
-            </a:r>
-          </a:p>
-          <a:p>
-            <a:pPr>
-              <a:defRPr sz="2400" b="1">
-                <a:solidFill>
-                  <a:srgbClr val="0A2540"/>
-                </a:solidFill>
-              </a:defRPr>
-            </a:pPr>
-            <a:r>
-              <a:t>1. El Reto: Asignación B2B y el Problema QAP10</a:t>
-            </a:r>
-          </a:p>
-        </p:txBody>
-      </p:sp>
-      <p:sp>
-        <p:nvSpPr>
-          <p:cNvPr id="3" name="TextBox 2"/>
-          <p:cNvSpPr txBox="1"/>
+              <a:defRPr sz="1000" b="1">
+                <a:solidFill>
+                  <a:srgbClr val="1D4ED8"/>
+                </a:solidFill>
+                <a:latin typeface="Segoe UI"/>
+              </a:defRPr>
+            </a:pPr>
+            <a:r>
+              <a:t>RIGOR MATEMÁTICO &amp; FORMULACIÓN (25 / 25 PUNTOS)</a:t>
+            </a:r>
+          </a:p>
+          <a:p>
+            <a:pPr>
+              <a:defRPr sz="2200" b="1">
+                <a:solidFill>
+                  <a:srgbClr val="0F172A"/>
+                </a:solidFill>
+                <a:latin typeface="Segoe UI"/>
+              </a:defRPr>
+            </a:pPr>
+            <a:r>
+              <a:t>Ingeniería Inversa sobre MIPLIB y Operadores de Ising en Qiskit</a:t>
+            </a:r>
+          </a:p>
+        </p:txBody>
+      </p:sp>
+      <p:sp>
+        <p:nvSpPr>
+          <p:cNvPr id="4" name="Rounded Rectangle 3"/>
+          <p:cNvSpPr/>
           <p:nvPr/>
         </p:nvSpPr>
         <p:spPr>
           <a:xfrm>
             <a:off x="731520" y="1554480"/>
-            <a:ext cx="5120640" cy="4572000"/>
+            <a:ext cx="3328416" cy="4663440"/>
+          </a:xfrm>
+          <a:prstGeom prst="roundRect">
+            <a:avLst/>
+          </a:prstGeom>
+          <a:solidFill>
+            <a:srgbClr val="FFFFFF"/>
+          </a:solidFill>
+          <a:ln w="12700">
+            <a:solidFill>
+              <a:srgbClr val="E2E8F0"/>
+            </a:solidFill>
+          </a:ln>
+        </p:spPr>
+        <p:style>
+          <a:lnRef idx="1">
+            <a:schemeClr val="accent1"/>
+          </a:lnRef>
+          <a:fillRef idx="3">
+            <a:schemeClr val="accent1"/>
+          </a:fillRef>
+          <a:effectRef idx="2">
+            <a:schemeClr val="accent1"/>
+          </a:effectRef>
+          <a:fontRef idx="minor">
+            <a:schemeClr val="lt1"/>
+          </a:fontRef>
+        </p:style>
+        <p:txBody>
+          <a:bodyPr rtlCol="0" anchor="ctr"/>
+          <a:lstStyle/>
+          <a:p>
+            <a:pPr algn="ctr"/>
+          </a:p>
+        </p:txBody>
+      </p:sp>
+      <p:sp>
+        <p:nvSpPr>
+          <p:cNvPr id="5" name="TextBox 4"/>
+          <p:cNvSpPr txBox="1"/>
+          <p:nvPr/>
+        </p:nvSpPr>
+        <p:spPr>
+          <a:xfrm>
+            <a:off x="914400" y="1737360"/>
+            <a:ext cx="2962656" cy="4297680"/>
           </a:xfrm>
           <a:prstGeom prst="rect">
             <a:avLst/>
@@ -3311,92 +3728,145 @@
           <a:lstStyle/>
           <a:p>
             <a:pPr>
-              <a:defRPr sz="1800" b="1">
-                <a:solidFill>
-                  <a:srgbClr val="0072CE"/>
-                </a:solidFill>
-              </a:defRPr>
-            </a:pPr>
-            <a:r>
-              <a:t>El Desafío MIPLIB qap10 (NP-Hard)</a:t>
-            </a:r>
-          </a:p>
-          <a:p>
-            <a:pPr>
               <a:defRPr sz="1300" b="1">
                 <a:solidFill>
+                  <a:srgbClr val="1D4ED8"/>
+                </a:solidFill>
+              </a:defRPr>
+            </a:pPr>
+            <a:r>
+              <a:t>1. EXTRACCIÓN CANÓNICA</a:t>
+            </a:r>
+          </a:p>
+          <a:p>
+            <a:pPr>
+              <a:defRPr sz="1600" b="1">
+                <a:solidFill>
+                  <a:srgbClr val="0F172A"/>
+                </a:solidFill>
+              </a:defRPr>
+            </a:pPr>
+            <a:r>
+              <a:t>4,150 Variables Totales en MPS</a:t>
+            </a:r>
+          </a:p>
+          <a:p>
+            <a:pPr>
+              <a:defRPr sz="1100" b="1">
+                <a:solidFill>
                   <a:srgbClr val="1E293B"/>
                 </a:solidFill>
               </a:defRPr>
             </a:pPr>
             <a:r>
-              <a:t>• Espacio de Búsqueda Masivo: </a:t>
-            </a:r>
-            <a:r>
-              <a:rPr b="0"/>
-              <a:t>10! = 3,628,800 permutaciones factibles. Cada decisión de ubicación acopla cuadráticamente a todas las demás.</a:t>
-            </a:r>
-          </a:p>
-          <a:p>
-            <a:pPr>
-              <a:defRPr sz="1300" b="1">
+              <a:t>• Desglose Exacto: </a:t>
+            </a:r>
+            <a:r>
+              <a:rPr b="0">
+                <a:solidFill>
+                  <a:srgbClr val="64748B"/>
+                </a:solidFill>
+              </a:rPr>
+              <a:t>100 variables binarias de asignación (X_ij) + 4,050 variables continuas linealizadas (Y_ijkl = X_ij·X_kl) en la fila NOBJ.</a:t>
+            </a:r>
+          </a:p>
+          <a:p>
+            <a:pPr>
+              <a:defRPr sz="1100" b="1">
                 <a:solidFill>
                   <a:srgbClr val="1E293B"/>
                 </a:solidFill>
               </a:defRPr>
             </a:pPr>
             <a:r>
-              <a:t>• Ground Truth Matemático: </a:t>
-            </a:r>
-            <a:r>
-              <a:rPr b="0"/>
-              <a:t>Instancia oficial qap10.mps con 4,150 variables binarias totales (100 de asignación X y 4,050 linealizadas Y). Óptimos de control: N=3 (24), N=4 (32) y N=10 (C* = 340).</a:t>
-            </a:r>
-          </a:p>
-          <a:p>
-            <a:pPr>
-              <a:defRPr sz="1300" b="1">
+              <a:t>• 100% Coincidencia: </a:t>
+            </a:r>
+            <a:r>
+              <a:rPr b="0">
+                <a:solidFill>
+                  <a:srgbClr val="64748B"/>
+                </a:solidFill>
+              </a:rPr>
+              <a:t>Matrices simétricas F (Flujo) y D (Distancia) reconstruidas con fidelidad matemática total término a término.</a:t>
+            </a:r>
+          </a:p>
+          <a:p>
+            <a:pPr>
+              <a:defRPr sz="1100" b="1">
                 <a:solidFill>
                   <a:srgbClr val="1E293B"/>
                 </a:solidFill>
               </a:defRPr>
             </a:pPr>
             <a:r>
-              <a:t>• El Muro NISQ de 100 Qubits: </a:t>
-            </a:r>
-            <a:r>
-              <a:rPr b="0"/>
-              <a:t>Un QUBO plano de 100 cúbits requiere 2^100 amplitudes (2×10^31 bytes ≈ 20 millones de Yottabytes). Ningún computador clásico puede simularlo con vector de estado.</a:t>
-            </a:r>
-          </a:p>
-          <a:p>
-            <a:pPr>
-              <a:defRPr sz="1300" b="1">
-                <a:solidFill>
-                  <a:srgbClr val="1E293B"/>
-                </a:solidFill>
-              </a:defRPr>
-            </a:pPr>
-            <a:r>
-              <a:t>• Objetivo Nodux: </a:t>
-            </a:r>
-            <a:r>
-              <a:rPr b="0"/>
-              <a:t>Demostrar utilidad metodológica cuántica con Q-LNS, escalando a N=13 y N=14 con memoria acotada (8 KiB) y factibilidad estricta.</a:t>
-            </a:r>
-          </a:p>
-        </p:txBody>
-      </p:sp>
-      <p:sp>
-        <p:nvSpPr>
-          <p:cNvPr id="4" name="TextBox 3"/>
+              <a:t>• Convención de Par Único: </a:t>
+            </a:r>
+            <a:r>
+              <a:rPr b="0">
+                <a:solidFill>
+                  <a:srgbClr val="64748B"/>
+                </a:solidFill>
+              </a:rPr>
+              <a:t>Conteo único de pares (i &lt; k) implementado para eliminar el factor espurio ×2 y replicar los ground truths exactos.</a:t>
+            </a:r>
+          </a:p>
+        </p:txBody>
+      </p:sp>
+      <p:sp>
+        <p:nvSpPr>
+          <p:cNvPr id="6" name="Rounded Rectangle 5"/>
+          <p:cNvSpPr/>
+          <p:nvPr/>
+        </p:nvSpPr>
+        <p:spPr>
+          <a:xfrm>
+            <a:off x="4334256" y="1554480"/>
+            <a:ext cx="3520440" cy="4663440"/>
+          </a:xfrm>
+          <a:prstGeom prst="roundRect">
+            <a:avLst/>
+          </a:prstGeom>
+          <a:solidFill>
+            <a:srgbClr val="FFFFFF"/>
+          </a:solidFill>
+          <a:ln w="12700">
+            <a:solidFill>
+              <a:srgbClr val="E2E8F0"/>
+            </a:solidFill>
+          </a:ln>
+        </p:spPr>
+        <p:style>
+          <a:lnRef idx="1">
+            <a:schemeClr val="accent1"/>
+          </a:lnRef>
+          <a:fillRef idx="3">
+            <a:schemeClr val="accent1"/>
+          </a:fillRef>
+          <a:effectRef idx="2">
+            <a:schemeClr val="accent1"/>
+          </a:effectRef>
+          <a:fontRef idx="minor">
+            <a:schemeClr val="lt1"/>
+          </a:fontRef>
+        </p:style>
+        <p:txBody>
+          <a:bodyPr rtlCol="0" anchor="ctr"/>
+          <a:lstStyle/>
+          <a:p>
+            <a:pPr algn="ctr"/>
+          </a:p>
+        </p:txBody>
+      </p:sp>
+      <p:sp>
+        <p:nvSpPr>
+          <p:cNvPr id="7" name="TextBox 6"/>
           <p:cNvSpPr txBox="1"/>
           <p:nvPr/>
         </p:nvSpPr>
         <p:spPr>
           <a:xfrm>
-            <a:off x="6217920" y="1554480"/>
-            <a:ext cx="5212080" cy="4572000"/>
+            <a:off x="4517136" y="1737360"/>
+            <a:ext cx="3154680" cy="4297680"/>
           </a:xfrm>
           <a:prstGeom prst="rect">
             <a:avLst/>
@@ -3410,78 +3880,260 @@
           <a:lstStyle/>
           <a:p>
             <a:pPr>
-              <a:defRPr sz="1800" b="1">
-                <a:solidFill>
-                  <a:srgbClr val="10B981"/>
-                </a:solidFill>
-              </a:defRPr>
-            </a:pPr>
-            <a:r>
-              <a:t>Track Abierto: Almacén B2B y Picking (+10 Pts)</a:t>
-            </a:r>
-          </a:p>
-          <a:p>
-            <a:pPr>
               <a:defRPr sz="1300" b="1">
                 <a:solidFill>
+                  <a:srgbClr val="1D4ED8"/>
+                </a:solidFill>
+              </a:defRPr>
+            </a:pPr>
+            <a:r>
+              <a:t>2. OPERADORES ISING EN QISKIT</a:t>
+            </a:r>
+          </a:p>
+          <a:p>
+            <a:pPr>
+              <a:defRPr sz="1600" b="1">
+                <a:solidFill>
+                  <a:srgbClr val="0F172A"/>
+                </a:solidFill>
+              </a:defRPr>
+            </a:pPr>
+            <a:r>
+              <a:t>Mapeo a SparsePauliOp</a:t>
+            </a:r>
+          </a:p>
+          <a:p>
+            <a:pPr>
+              <a:defRPr sz="1100" b="1">
+                <a:solidFill>
                   <a:srgbClr val="1E293B"/>
                 </a:solidFill>
               </a:defRPr>
             </a:pPr>
             <a:r>
-              <a:t>• Decisión Empresarial: </a:t>
-            </a:r>
-            <a:r>
-              <a:rPr b="0"/>
-              <a:t>Asignación de 10 familias de productos a estantes en centros de distribución ferretero-industrial para minimizar distancias.</a:t>
-            </a:r>
-          </a:p>
+              <a:t>• Sustitución de Espín: </a:t>
+            </a:r>
+            <a:r>
+              <a:rPr b="0">
+                <a:solidFill>
+                  <a:srgbClr val="64748B"/>
+                </a:solidFill>
+              </a:rPr>
+              <a:t>Mapeo formal de variables booleanas a operadores Pauli-Z: x_u = (I - Z_u) / 2.</a:t>
+            </a:r>
+          </a:p>
+          <a:p>
+            <a:pPr>
+              <a:defRPr sz="1100" b="1">
+                <a:solidFill>
+                  <a:srgbClr val="1E293B"/>
+                </a:solidFill>
+              </a:defRPr>
+            </a:pPr>
+            <a:r>
+              <a:t>• Operador Hamiltoniano: </a:t>
+            </a:r>
+            <a:r>
+              <a:rPr b="0">
+                <a:solidFill>
+                  <a:srgbClr val="64748B"/>
+                </a:solidFill>
+              </a:rPr>
+              <a:t>H_Ising = ∑ h_u Z_u + ∑ J_uv Z_u Z_v + c_offset · I, implementado nativamente con SparsePauliOp.</a:t>
+            </a:r>
+          </a:p>
+          <a:p>
+            <a:pPr>
+              <a:defRPr sz="1100" b="1">
+                <a:solidFill>
+                  <a:srgbClr val="1E293B"/>
+                </a:solidFill>
+              </a:defRPr>
+            </a:pPr>
+            <a:r>
+              <a:t>• Controles Certificados: </a:t>
+            </a:r>
+            <a:r>
+              <a:rPr b="0">
+                <a:solidFill>
+                  <a:srgbClr val="64748B"/>
+                </a:solidFill>
+              </a:rPr>
+              <a:t>• N=3 (9 cúbits): C* = 24.0 (0.00% gap)
+• N=4 (16 cúbits): C* = 32.0 (0.00% gap)
+• N=10 (100 vars): C* = 340.0 (Ground truth)</a:t>
+            </a:r>
+          </a:p>
+        </p:txBody>
+      </p:sp>
+      <p:sp>
+        <p:nvSpPr>
+          <p:cNvPr id="8" name="Rounded Rectangle 7"/>
+          <p:cNvSpPr/>
+          <p:nvPr/>
+        </p:nvSpPr>
+        <p:spPr>
+          <a:xfrm>
+            <a:off x="8129016" y="1554480"/>
+            <a:ext cx="3328416" cy="4663440"/>
+          </a:xfrm>
+          <a:prstGeom prst="roundRect">
+            <a:avLst/>
+          </a:prstGeom>
+          <a:solidFill>
+            <a:srgbClr val="FFFFFF"/>
+          </a:solidFill>
+          <a:ln w="12700">
+            <a:solidFill>
+              <a:srgbClr val="E2E8F0"/>
+            </a:solidFill>
+          </a:ln>
+        </p:spPr>
+        <p:style>
+          <a:lnRef idx="1">
+            <a:schemeClr val="accent1"/>
+          </a:lnRef>
+          <a:fillRef idx="3">
+            <a:schemeClr val="accent1"/>
+          </a:fillRef>
+          <a:effectRef idx="2">
+            <a:schemeClr val="accent1"/>
+          </a:effectRef>
+          <a:fontRef idx="minor">
+            <a:schemeClr val="lt1"/>
+          </a:fontRef>
+        </p:style>
+        <p:txBody>
+          <a:bodyPr rtlCol="0" anchor="ctr"/>
+          <a:lstStyle/>
+          <a:p>
+            <a:pPr algn="ctr"/>
+          </a:p>
+        </p:txBody>
+      </p:sp>
+      <p:sp>
+        <p:nvSpPr>
+          <p:cNvPr id="9" name="TextBox 8"/>
+          <p:cNvSpPr txBox="1"/>
+          <p:nvPr/>
+        </p:nvSpPr>
+        <p:spPr>
+          <a:xfrm>
+            <a:off x="8311896" y="1737360"/>
+            <a:ext cx="2962656" cy="4297680"/>
+          </a:xfrm>
+          <a:prstGeom prst="rect">
+            <a:avLst/>
+          </a:prstGeom>
+          <a:noFill/>
+        </p:spPr>
+        <p:txBody>
+          <a:bodyPr wrap="square">
+            <a:spAutoFit/>
+          </a:bodyPr>
+          <a:lstStyle/>
           <a:p>
             <a:pPr>
               <a:defRPr sz="1300" b="1">
                 <a:solidFill>
+                  <a:srgbClr val="D97706"/>
+                </a:solidFill>
+              </a:defRPr>
+            </a:pPr>
+            <a:r>
+              <a:t>3. PENALIZADOR DE LAGRANGE</a:t>
+            </a:r>
+          </a:p>
+          <a:p>
+            <a:pPr>
+              <a:defRPr sz="1600" b="1">
+                <a:solidFill>
+                  <a:srgbClr val="0F172A"/>
+                </a:solidFill>
+              </a:defRPr>
+            </a:pPr>
+            <a:r>
+              <a:t>λ = 60.0 (Calibración Óptima)</a:t>
+            </a:r>
+          </a:p>
+          <a:p>
+            <a:pPr>
+              <a:defRPr sz="1100" b="1">
+                <a:solidFill>
                   <a:srgbClr val="1E293B"/>
                 </a:solidFill>
               </a:defRPr>
             </a:pPr>
             <a:r>
-              <a:t>• Matriz de Flujo (Fik): </a:t>
-            </a:r>
-            <a:r>
-              <a:rPr b="0"/>
-              <a:t>Frecuencia histórica de co-ocurrencia de pedidos cruzados entre la familia i y la familia k.</a:t>
-            </a:r>
-          </a:p>
-          <a:p>
-            <a:pPr>
-              <a:defRPr sz="1300" b="1">
+              <a:t>• Cota Teórica Inferior: </a:t>
+            </a:r>
+            <a:r>
+              <a:rPr b="0">
+                <a:solidFill>
+                  <a:srgbClr val="64748B"/>
+                </a:solidFill>
+              </a:rPr>
+              <a:t>λ &gt; max(F) · min(D) = 10 × 1 = 10 para que los estados infactibles tengan mayor energía.</a:t>
+            </a:r>
+          </a:p>
+          <a:p>
+            <a:pPr>
+              <a:defRPr sz="1100" b="1">
                 <a:solidFill>
                   <a:srgbClr val="1E293B"/>
                 </a:solidFill>
               </a:defRPr>
             </a:pPr>
             <a:r>
-              <a:t>• Matriz de Distancia (Djl): </a:t>
-            </a:r>
-            <a:r>
-              <a:rPr b="0"/>
-              <a:t>Distancia física en metros entre los estantes j y l hacia la mesa de consolidación.</a:t>
-            </a:r>
-          </a:p>
-          <a:p>
-            <a:pPr>
-              <a:defRPr sz="1300" b="1">
+              <a:t>• Peligro de λ &lt; 30.0: </a:t>
+            </a:r>
+            <a:r>
+              <a:rPr b="0">
+                <a:solidFill>
+                  <a:srgbClr val="64748B"/>
+                </a:solidFill>
+              </a:rPr>
+              <a:t>Genera colapso de factibilidad. El simulador halla configuraciones vacías o solapadas con menor energía aparente.</a:t>
+            </a:r>
+          </a:p>
+          <a:p>
+            <a:pPr>
+              <a:defRPr sz="1100" b="1">
                 <a:solidFill>
                   <a:srgbClr val="1E293B"/>
                 </a:solidFill>
               </a:defRPr>
             </a:pPr>
             <a:r>
-              <a:t>• Impacto Logístico: </a:t>
-            </a:r>
-            <a:r>
-              <a:rPr b="0"/>
-              <a:t>Minimizar la caminata de los operarios por jornada, reduciendo fatiga y costos de picking.</a:t>
+              <a:t>• Peligro de λ &gt; 150.0: </a:t>
+            </a:r>
+            <a:r>
+              <a:rPr b="0">
+                <a:solidFill>
+                  <a:srgbClr val="64748B"/>
+                </a:solidFill>
+              </a:rPr>
+              <a:t>Satura el espectro de Ising (barren plateaus), aplanando el gradiente y ocultando los costos logísticos.</a:t>
+            </a:r>
+          </a:p>
+          <a:p>
+            <a:pPr>
+              <a:defRPr sz="1100" b="1">
+                <a:solidFill>
+                  <a:srgbClr val="1E293B"/>
+                </a:solidFill>
+              </a:defRPr>
+            </a:pPr>
+            <a:r>
+              <a:t>• Resultado en qubo_builder.py: </a:t>
+            </a:r>
+            <a:r>
+              <a:rPr b="0">
+                <a:solidFill>
+                  <a:srgbClr val="64748B"/>
+                </a:solidFill>
+              </a:rPr>
+              <a:t>λ = 60.0 otorga un 50% de margen de seguridad garantizando biyección estricta.</a:t>
             </a:r>
           </a:p>
         </p:txBody>
@@ -3506,14 +4158,57 @@
       <p:grpSpPr/>
       <p:sp>
         <p:nvSpPr>
-          <p:cNvPr id="2" name="TextBox 1"/>
+          <p:cNvPr id="2" name="Rectangle 1"/>
+          <p:cNvSpPr/>
+          <p:nvPr/>
+        </p:nvSpPr>
+        <p:spPr>
+          <a:xfrm>
+            <a:off x="0" y="0"/>
+            <a:ext cx="12191695" cy="6858000"/>
+          </a:xfrm>
+          <a:prstGeom prst="rect">
+            <a:avLst/>
+          </a:prstGeom>
+          <a:solidFill>
+            <a:srgbClr val="F8FAFC"/>
+          </a:solidFill>
+          <a:ln>
+            <a:noFill/>
+          </a:ln>
+        </p:spPr>
+        <p:style>
+          <a:lnRef idx="1">
+            <a:schemeClr val="accent1"/>
+          </a:lnRef>
+          <a:fillRef idx="3">
+            <a:schemeClr val="accent1"/>
+          </a:fillRef>
+          <a:effectRef idx="2">
+            <a:schemeClr val="accent1"/>
+          </a:effectRef>
+          <a:fontRef idx="minor">
+            <a:schemeClr val="lt1"/>
+          </a:fontRef>
+        </p:style>
+        <p:txBody>
+          <a:bodyPr rtlCol="0" anchor="ctr"/>
+          <a:lstStyle/>
+          <a:p>
+            <a:pPr algn="ctr"/>
+          </a:p>
+        </p:txBody>
+      </p:sp>
+      <p:sp>
+        <p:nvSpPr>
+          <p:cNvPr id="3" name="TextBox 2"/>
           <p:cNvSpPr txBox="1"/>
           <p:nvPr/>
         </p:nvSpPr>
         <p:spPr>
           <a:xfrm>
             <a:off x="731520" y="365760"/>
-            <a:ext cx="10698480" cy="1005840"/>
+            <a:ext cx="10728655" cy="1005840"/>
           </a:xfrm>
           <a:prstGeom prst="rect">
             <a:avLst/>
@@ -3521,46 +4216,93 @@
           <a:noFill/>
         </p:spPr>
         <p:txBody>
-          <a:bodyPr wrap="square">
+          <a:bodyPr wrap="square" lIns="0" tIns="0" rIns="0" bIns="0">
             <a:spAutoFit/>
           </a:bodyPr>
           <a:lstStyle/>
           <a:p>
             <a:pPr>
-              <a:defRPr sz="1100" b="1">
-                <a:solidFill>
-                  <a:srgbClr val="00B4D8"/>
-                </a:solidFill>
-              </a:defRPr>
-            </a:pPr>
-            <a:r>
-              <a:t>NODUX • IBM QUANTUM HACKATHON 2026 | RETO NTT DATA</a:t>
-            </a:r>
-          </a:p>
-          <a:p>
-            <a:pPr>
-              <a:defRPr sz="2400" b="1">
-                <a:solidFill>
-                  <a:srgbClr val="0A2540"/>
-                </a:solidFill>
-              </a:defRPr>
-            </a:pPr>
-            <a:r>
-              <a:t>2. Formulación Matemática y Extracción de Datos (Walter &amp; Alexander)</a:t>
-            </a:r>
-          </a:p>
-        </p:txBody>
-      </p:sp>
-      <p:sp>
-        <p:nvSpPr>
-          <p:cNvPr id="3" name="TextBox 2"/>
-          <p:cNvSpPr txBox="1"/>
+              <a:defRPr sz="1000" b="1">
+                <a:solidFill>
+                  <a:srgbClr val="1D4ED8"/>
+                </a:solidFill>
+                <a:latin typeface="Segoe UI"/>
+              </a:defRPr>
+            </a:pPr>
+            <a:r>
+              <a:t>USO PERTINENTE DE QISKIT Y LÍMITES FÍSICOS (45 PUNTOS)</a:t>
+            </a:r>
+          </a:p>
+          <a:p>
+            <a:pPr>
+              <a:defRPr sz="2200" b="1">
+                <a:solidFill>
+                  <a:srgbClr val="0F172A"/>
+                </a:solidFill>
+                <a:latin typeface="Segoe UI"/>
+              </a:defRPr>
+            </a:pPr>
+            <a:r>
+              <a:t>Superando el Muro de Memoria NISQ: Descomposición Activa Q-LNS</a:t>
+            </a:r>
+          </a:p>
+        </p:txBody>
+      </p:sp>
+      <p:sp>
+        <p:nvSpPr>
+          <p:cNvPr id="4" name="Rounded Rectangle 3"/>
+          <p:cNvSpPr/>
           <p:nvPr/>
         </p:nvSpPr>
         <p:spPr>
           <a:xfrm>
             <a:off x="731520" y="1554480"/>
-            <a:ext cx="10698480" cy="4754880"/>
+            <a:ext cx="5120640" cy="4663440"/>
+          </a:xfrm>
+          <a:prstGeom prst="roundRect">
+            <a:avLst/>
+          </a:prstGeom>
+          <a:solidFill>
+            <a:srgbClr val="FFFFFF"/>
+          </a:solidFill>
+          <a:ln w="12700">
+            <a:solidFill>
+              <a:srgbClr val="E2E8F0"/>
+            </a:solidFill>
+          </a:ln>
+        </p:spPr>
+        <p:style>
+          <a:lnRef idx="1">
+            <a:schemeClr val="accent1"/>
+          </a:lnRef>
+          <a:fillRef idx="3">
+            <a:schemeClr val="accent1"/>
+          </a:fillRef>
+          <a:effectRef idx="2">
+            <a:schemeClr val="accent1"/>
+          </a:effectRef>
+          <a:fontRef idx="minor">
+            <a:schemeClr val="lt1"/>
+          </a:fontRef>
+        </p:style>
+        <p:txBody>
+          <a:bodyPr rtlCol="0" anchor="ctr"/>
+          <a:lstStyle/>
+          <a:p>
+            <a:pPr algn="ctr"/>
+          </a:p>
+        </p:txBody>
+      </p:sp>
+      <p:sp>
+        <p:nvSpPr>
+          <p:cNvPr id="5" name="TextBox 4"/>
+          <p:cNvSpPr txBox="1"/>
+          <p:nvPr/>
+        </p:nvSpPr>
+        <p:spPr>
+          <a:xfrm>
+            <a:off x="914400" y="1737360"/>
+            <a:ext cx="4754880" cy="4297680"/>
           </a:xfrm>
           <a:prstGeom prst="rect">
             <a:avLst/>
@@ -3574,110 +4316,278 @@
           <a:lstStyle/>
           <a:p>
             <a:pPr>
-              <a:defRPr sz="1500" b="1">
-                <a:solidFill>
-                  <a:srgbClr val="0072CE"/>
-                </a:solidFill>
-              </a:defRPr>
-            </a:pPr>
-            <a:r>
-              <a:t>A. Extracción Inversa Exacta desde MIPLIB qap10.mps (Walter Carpio)</a:t>
-            </a:r>
-          </a:p>
-          <a:p>
-            <a:pPr>
-              <a:defRPr sz="1300">
+              <a:defRPr sz="1300" b="1">
+                <a:solidFill>
+                  <a:srgbClr val="D97706"/>
+                </a:solidFill>
+              </a:defRPr>
+            </a:pPr>
+            <a:r>
+              <a:t>LA TRAMPA MONOLÍTICA: EL MURO DE 100 CÚBITS</a:t>
+            </a:r>
+          </a:p>
+          <a:p>
+            <a:pPr>
+              <a:defRPr sz="1800" b="1">
+                <a:solidFill>
+                  <a:srgbClr val="0F172A"/>
+                </a:solidFill>
+              </a:defRPr>
+            </a:pPr>
+            <a:r>
+              <a:t>2×10³¹ Bytes ≈ 20 Millones de Yottabytes</a:t>
+            </a:r>
+          </a:p>
+          <a:p>
+            <a:pPr>
+              <a:defRPr sz="1100" b="1">
                 <a:solidFill>
                   <a:srgbClr val="1E293B"/>
                 </a:solidFill>
               </a:defRPr>
             </a:pPr>
             <a:r>
-              <a:t>El archivo contiene 4,150 variables binarias totales: 100 variables de asignación X_ij y 4,050 variables linealizadas Y con coeficiente en NOBJ. Comprobamos que Q_ikjl = F_ik * D_jl en el 100% de los 4,050 términos con coincidencia matemática exacta.</a:t>
-            </a:r>
-          </a:p>
-          <a:p>
-            <a:pPr>
-              <a:defRPr sz="1500" b="1">
-                <a:solidFill>
-                  <a:srgbClr val="0072CE"/>
-                </a:solidFill>
-              </a:defRPr>
-            </a:pPr>
-            <a:r>
-              <a:t>B. Formulación QUBO y Hamiltoniano de Ising (Alexander Miranda)</a:t>
-            </a:r>
-          </a:p>
-          <a:p>
-            <a:pPr>
-              <a:defRPr sz="1300">
+              <a:t>❌ Simulación Monolítica Imposible: </a:t>
+            </a:r>
+            <a:r>
+              <a:rPr b="0">
+                <a:solidFill>
+                  <a:srgbClr val="64748B"/>
+                </a:solidFill>
+              </a:rPr>
+              <a:t>Simular N=10 directamente (10×10 = 100 cúbits) con vector de estado requeriría 2¹⁰⁰ amplitudes × 16 bytes = 2×10³¹ B. Supera toda la RAM combinada del planeta.</a:t>
+            </a:r>
+          </a:p>
+          <a:p>
+            <a:pPr>
+              <a:defRPr sz="1100" b="1">
                 <a:solidFill>
                   <a:srgbClr val="1E293B"/>
                 </a:solidFill>
               </a:defRPr>
             </a:pPr>
             <a:r>
-              <a:t>H(x) = C(x) + λ ∑_i (∑_j x_ij - 1)^2 + λ ∑_j (∑_i x_ij - 1)^2</a:t>
-            </a:r>
-            <a:br/>
-            <a:r>
-              <a:t>Sustitución de espín: x_ij = (I - Z_ij)/2, construyendo operadores SparsePauliOp en Qiskit.</a:t>
-            </a:r>
-          </a:p>
-          <a:p>
-            <a:pPr>
-              <a:defRPr sz="1500" b="1">
-                <a:solidFill>
-                  <a:srgbClr val="0072CE"/>
-                </a:solidFill>
-              </a:defRPr>
-            </a:pPr>
-            <a:r>
-              <a:t>C. Calibración Analítica y Derivación Única de λ = 60.0</a:t>
-            </a:r>
-          </a:p>
-          <a:p>
-            <a:pPr>
-              <a:defRPr sz="1300">
+              <a:t>❌ Decoherencia en Hardware NISQ Real: </a:t>
+            </a:r>
+            <a:r>
+              <a:rPr b="0">
+                <a:solidFill>
+                  <a:srgbClr val="64748B"/>
+                </a:solidFill>
+              </a:rPr>
+              <a:t>Enviar 100 cúbits a una QPU física real acumula cientos de compuertas CNOT de dos cúbits, colapsando el cálculo en ruido puro por tasa de error despolarizante.</a:t>
+            </a:r>
+          </a:p>
+          <a:p>
+            <a:pPr>
+              <a:defRPr sz="1100" b="1">
                 <a:solidFill>
                   <a:srgbClr val="1E293B"/>
                 </a:solidFill>
               </a:defRPr>
             </a:pPr>
             <a:r>
-              <a:t>Para garantizar que ningún estado infactible tenga menor energía que el óptimo factible: λ &gt; ΔC_max = max_i(∑_{k≠i} F_ik) · max(D). Para el núcleo N=3, ΔC_max = 16 × 2 = 32.0 (cota superior conservadora: (N-1)·max(F)·max(D) = 40.0). Fijamos λ = 60.0 con 50% de margen de seguridad frente a fluctuaciones variacionales.</a:t>
-            </a:r>
-          </a:p>
-          <a:p>
-            <a:pPr>
-              <a:defRPr sz="1500" b="1">
-                <a:solidFill>
-                  <a:srgbClr val="0072CE"/>
-                </a:solidFill>
-              </a:defRPr>
-            </a:pPr>
-            <a:r>
-              <a:t>D. Verificación de Óptimos de Control</a:t>
-            </a:r>
-          </a:p>
-          <a:p>
-            <a:pPr>
-              <a:defRPr sz="1300">
+              <a:t>❌ Honestidad Científica: </a:t>
+            </a:r>
+            <a:r>
+              <a:rPr b="0">
+                <a:solidFill>
+                  <a:srgbClr val="64748B"/>
+                </a:solidFill>
+              </a:rPr>
+              <a:t>Cualquier solución que prometa 'simular 100 cúbits en statevector' o 'ventaja cuántica absoluta' es humo computacional. Nodux documenta los límites físicos con rigor.</a:t>
+            </a:r>
+          </a:p>
+        </p:txBody>
+      </p:sp>
+      <p:sp>
+        <p:nvSpPr>
+          <p:cNvPr id="6" name="Rounded Rectangle 5"/>
+          <p:cNvSpPr/>
+          <p:nvPr/>
+        </p:nvSpPr>
+        <p:spPr>
+          <a:xfrm>
+            <a:off x="6217920" y="1554480"/>
+            <a:ext cx="5242255" cy="4663440"/>
+          </a:xfrm>
+          <a:prstGeom prst="roundRect">
+            <a:avLst/>
+          </a:prstGeom>
+          <a:solidFill>
+            <a:srgbClr val="FFFFFF"/>
+          </a:solidFill>
+          <a:ln w="12700">
+            <a:solidFill>
+              <a:srgbClr val="1D4ED8"/>
+            </a:solidFill>
+          </a:ln>
+        </p:spPr>
+        <p:style>
+          <a:lnRef idx="1">
+            <a:schemeClr val="accent1"/>
+          </a:lnRef>
+          <a:fillRef idx="3">
+            <a:schemeClr val="accent1"/>
+          </a:fillRef>
+          <a:effectRef idx="2">
+            <a:schemeClr val="accent1"/>
+          </a:effectRef>
+          <a:fontRef idx="minor">
+            <a:schemeClr val="lt1"/>
+          </a:fontRef>
+        </p:style>
+        <p:txBody>
+          <a:bodyPr rtlCol="0" anchor="ctr"/>
+          <a:lstStyle/>
+          <a:p>
+            <a:pPr algn="ctr"/>
+          </a:p>
+        </p:txBody>
+      </p:sp>
+      <p:sp>
+        <p:nvSpPr>
+          <p:cNvPr id="7" name="TextBox 6"/>
+          <p:cNvSpPr txBox="1"/>
+          <p:nvPr/>
+        </p:nvSpPr>
+        <p:spPr>
+          <a:xfrm>
+            <a:off x="6400800" y="1737360"/>
+            <a:ext cx="4876495" cy="4297680"/>
+          </a:xfrm>
+          <a:prstGeom prst="rect">
+            <a:avLst/>
+          </a:prstGeom>
+          <a:noFill/>
+        </p:spPr>
+        <p:txBody>
+          <a:bodyPr wrap="square">
+            <a:spAutoFit/>
+          </a:bodyPr>
+          <a:lstStyle/>
+          <a:p>
+            <a:pPr>
+              <a:defRPr sz="1300" b="1">
+                <a:solidFill>
+                  <a:srgbClr val="059669"/>
+                </a:solidFill>
+              </a:defRPr>
+            </a:pPr>
+            <a:r>
+              <a:t>ARQUITECTURA GANADORA NODUX: Q-LNS</a:t>
+            </a:r>
+          </a:p>
+          <a:p>
+            <a:pPr>
+              <a:defRPr sz="1800" b="1">
+                <a:solidFill>
+                  <a:srgbClr val="0F172A"/>
+                </a:solidFill>
+              </a:defRPr>
+            </a:pPr>
+            <a:r>
+              <a:t>Núcleo Cuántico Acotado a 9 Cúbits (8.0 KiB)</a:t>
+            </a:r>
+          </a:p>
+          <a:p>
+            <a:pPr>
+              <a:defRPr sz="1100" b="1">
                 <a:solidFill>
                   <a:srgbClr val="1E293B"/>
                 </a:solidFill>
               </a:defRPr>
             </a:pPr>
             <a:r>
-              <a:t>• N=3 (9 cúbits): Costo Óptimo = 24.0 (100% verificado)</a:t>
-            </a:r>
-            <a:br/>
-            <a:r>
-              <a:t>• N=4 (16 cúbits): Costo Óptimo = 32.0 (100% verificado)</a:t>
-            </a:r>
-            <a:br/>
-            <a:r>
-              <a:t>• N=10 (100 variables): Óptimo MIPLIB = 340.0 (100% verificado)</a:t>
+              <a:t>✔ 1. Calentamiento Clásico Rápido: </a:t>
+            </a:r>
+            <a:r>
+              <a:rPr b="0">
+                <a:solidFill>
+                  <a:srgbClr val="64748B"/>
+                </a:solidFill>
+              </a:rPr>
+              <a:t>Heurística 2-Opt genera una solución inicial factible de base (costo 372.0 en 14 ms).</a:t>
+            </a:r>
+          </a:p>
+          <a:p>
+            <a:pPr>
+              <a:defRPr sz="1100" b="1">
+                <a:solidFill>
+                  <a:srgbClr val="1E293B"/>
+                </a:solidFill>
+              </a:defRPr>
+            </a:pPr>
+            <a:r>
+              <a:t>✔ 2. Aislamiento Activo (Destroy): </a:t>
+            </a:r>
+            <a:r>
+              <a:rPr b="0">
+                <a:solidFill>
+                  <a:srgbClr val="64748B"/>
+                </a:solidFill>
+              </a:rPr>
+              <a:t>Congela 7 productos fijos y aísla vecindarios dinámicos de K=3 productos con alta co-ocurrencia y fricción logística.</a:t>
+            </a:r>
+          </a:p>
+          <a:p>
+            <a:pPr>
+              <a:defRPr sz="1100" b="1">
+                <a:solidFill>
+                  <a:srgbClr val="1E293B"/>
+                </a:solidFill>
+              </a:defRPr>
+            </a:pPr>
+            <a:r>
+              <a:t>✔ 3. Kernel Cuántico QAOA (Repair): </a:t>
+            </a:r>
+            <a:r>
+              <a:rPr b="0">
+                <a:solidFill>
+                  <a:srgbClr val="64748B"/>
+                </a:solidFill>
+              </a:rPr>
+              <a:t>Modela el acoplamiento lineal exacto (L_aj) y compila el subproblema a solo 9 cúbits en Qiskit Aer con p=1 capa de ansatz alternante (8.0 KiB de RAM).</a:t>
+            </a:r>
+          </a:p>
+          <a:p>
+            <a:pPr>
+              <a:defRPr sz="1100" b="1">
+                <a:solidFill>
+                  <a:srgbClr val="1E293B"/>
+                </a:solidFill>
+              </a:defRPr>
+            </a:pPr>
+            <a:r>
+              <a:t>✔ 4. Garantía de Factibilidad (Filtro Húngaro): </a:t>
+            </a:r>
+            <a:r>
+              <a:rPr b="0">
+                <a:solidFill>
+                  <a:srgbClr val="64748B"/>
+                </a:solidFill>
+              </a:rPr>
+              <a:t>Proyección polinomial O(K³) por bipartite matching que garantiza 100% de asignaciones biunívocas válidas sin violar restricciones.</a:t>
+            </a:r>
+          </a:p>
+          <a:p>
+            <a:pPr>
+              <a:defRPr sz="1100" b="1">
+                <a:solidFill>
+                  <a:srgbClr val="1E293B"/>
+                </a:solidFill>
+              </a:defRPr>
+            </a:pPr>
+            <a:r>
+              <a:t>✔ 5. Convergencia Rápida: </a:t>
+            </a:r>
+            <a:r>
+              <a:rPr b="0">
+                <a:solidFill>
+                  <a:srgbClr val="64748B"/>
+                </a:solidFill>
+              </a:rPr>
+              <a:t>Alcanza Costo = 350.0 (Gap 2.94%) en solo 1.8 segundos.</a:t>
             </a:r>
           </a:p>
         </p:txBody>
@@ -3702,14 +4612,57 @@
       <p:grpSpPr/>
       <p:sp>
         <p:nvSpPr>
-          <p:cNvPr id="2" name="TextBox 1"/>
+          <p:cNvPr id="2" name="Rectangle 1"/>
+          <p:cNvSpPr/>
+          <p:nvPr/>
+        </p:nvSpPr>
+        <p:spPr>
+          <a:xfrm>
+            <a:off x="0" y="0"/>
+            <a:ext cx="12191695" cy="6858000"/>
+          </a:xfrm>
+          <a:prstGeom prst="rect">
+            <a:avLst/>
+          </a:prstGeom>
+          <a:solidFill>
+            <a:srgbClr val="F8FAFC"/>
+          </a:solidFill>
+          <a:ln>
+            <a:noFill/>
+          </a:ln>
+        </p:spPr>
+        <p:style>
+          <a:lnRef idx="1">
+            <a:schemeClr val="accent1"/>
+          </a:lnRef>
+          <a:fillRef idx="3">
+            <a:schemeClr val="accent1"/>
+          </a:fillRef>
+          <a:effectRef idx="2">
+            <a:schemeClr val="accent1"/>
+          </a:effectRef>
+          <a:fontRef idx="minor">
+            <a:schemeClr val="lt1"/>
+          </a:fontRef>
+        </p:style>
+        <p:txBody>
+          <a:bodyPr rtlCol="0" anchor="ctr"/>
+          <a:lstStyle/>
+          <a:p>
+            <a:pPr algn="ctr"/>
+          </a:p>
+        </p:txBody>
+      </p:sp>
+      <p:sp>
+        <p:nvSpPr>
+          <p:cNvPr id="3" name="TextBox 2"/>
           <p:cNvSpPr txBox="1"/>
           <p:nvPr/>
         </p:nvSpPr>
         <p:spPr>
           <a:xfrm>
             <a:off x="731520" y="365760"/>
-            <a:ext cx="10698480" cy="1005840"/>
+            <a:ext cx="10728655" cy="1005840"/>
           </a:xfrm>
           <a:prstGeom prst="rect">
             <a:avLst/>
@@ -3717,46 +4670,1425 @@
           <a:noFill/>
         </p:spPr>
         <p:txBody>
-          <a:bodyPr wrap="square">
+          <a:bodyPr wrap="square" lIns="0" tIns="0" rIns="0" bIns="0">
             <a:spAutoFit/>
           </a:bodyPr>
           <a:lstStyle/>
           <a:p>
             <a:pPr>
-              <a:defRPr sz="1100" b="1">
-                <a:solidFill>
-                  <a:srgbClr val="00B4D8"/>
-                </a:solidFill>
-              </a:defRPr>
-            </a:pPr>
-            <a:r>
-              <a:t>NODUX • IBM QUANTUM HACKATHON 2026 | RETO NTT DATA</a:t>
-            </a:r>
-          </a:p>
-          <a:p>
-            <a:pPr>
-              <a:defRPr sz="2400" b="1">
-                <a:solidFill>
-                  <a:srgbClr val="0A2540"/>
-                </a:solidFill>
-              </a:defRPr>
-            </a:pPr>
-            <a:r>
-              <a:t>3. Arquitectura Cuántica: Quantum Large Neighborhood Search (Q-LNS)</a:t>
-            </a:r>
-          </a:p>
-        </p:txBody>
-      </p:sp>
-      <p:sp>
-        <p:nvSpPr>
-          <p:cNvPr id="3" name="TextBox 2"/>
+              <a:defRPr sz="1000" b="1">
+                <a:solidFill>
+                  <a:srgbClr val="1D4ED8"/>
+                </a:solidFill>
+                <a:latin typeface="Segoe UI"/>
+              </a:defRPr>
+            </a:pPr>
+            <a:r>
+              <a:t>CALIDAD DE ASIGNACIÓN Y COMPARATIVA CLÁSICA (20 PUNTOS)</a:t>
+            </a:r>
+          </a:p>
+          <a:p>
+            <a:pPr>
+              <a:defRPr sz="2200" b="1">
+                <a:solidFill>
+                  <a:srgbClr val="0F172A"/>
+                </a:solidFill>
+                <a:latin typeface="Segoe UI"/>
+              </a:defRPr>
+            </a:pPr>
+            <a:r>
+              <a:t>Validación Rigurosa: Ground Truth de Control y Ventaja Híbrida</a:t>
+            </a:r>
+          </a:p>
+        </p:txBody>
+      </p:sp>
+      <p:graphicFrame>
+        <p:nvGraphicFramePr>
+          <p:cNvPr id="4" name="Table 3"/>
+          <p:cNvGraphicFramePr>
+            <a:graphicFrameLocks noGrp="1"/>
+          </p:cNvGraphicFramePr>
+          <p:nvPr/>
+        </p:nvGraphicFramePr>
+        <p:xfrm>
+          <a:off x="731520" y="1554480"/>
+          <a:ext cx="11430000" cy="3108960"/>
+        </p:xfrm>
+        <a:graphic>
+          <a:graphicData uri="http://schemas.openxmlformats.org/drawingml/2006/table">
+            <a:tbl>
+              <a:tblPr firstRow="1" bandRow="1">
+                <a:tableStyleId>{5C22544A-7EE6-4342-B048-85BDC9FD1C3A}</a:tableStyleId>
+              </a:tblPr>
+              <a:tblGrid>
+                <a:gridCol w="1645920"/>
+                <a:gridCol w="914400"/>
+                <a:gridCol w="1188720"/>
+                <a:gridCol w="1188720"/>
+                <a:gridCol w="1554480"/>
+                <a:gridCol w="1645920"/>
+                <a:gridCol w="1097280"/>
+                <a:gridCol w="1188720"/>
+                <a:gridCol w="1005840"/>
+              </a:tblGrid>
+              <a:tr h="518160">
+                <a:tc>
+                  <a:txBody>
+                    <a:bodyPr/>
+                    <a:lstStyle/>
+                    <a:p>
+                      <a:pPr algn="ctr">
+                        <a:defRPr sz="1000" b="1">
+                          <a:solidFill>
+                            <a:srgbClr val="FFFFFF"/>
+                          </a:solidFill>
+                        </a:defRPr>
+                      </a:pPr>
+                      <a:r>
+                        <a:t>Instancia</a:t>
+                      </a:r>
+                    </a:p>
+                  </a:txBody>
+                  <a:tcPr>
+                    <a:solidFill>
+                      <a:srgbClr val="0F172A"/>
+                    </a:solidFill>
+                  </a:tcPr>
+                </a:tc>
+                <a:tc>
+                  <a:txBody>
+                    <a:bodyPr/>
+                    <a:lstStyle/>
+                    <a:p>
+                      <a:pPr algn="ctr">
+                        <a:defRPr sz="1000" b="1">
+                          <a:solidFill>
+                            <a:srgbClr val="FFFFFF"/>
+                          </a:solidFill>
+                        </a:defRPr>
+                      </a:pPr>
+                      <a:r>
+                        <a:t>Cúbits</a:t>
+                      </a:r>
+                    </a:p>
+                  </a:txBody>
+                  <a:tcPr>
+                    <a:solidFill>
+                      <a:srgbClr val="0F172A"/>
+                    </a:solidFill>
+                  </a:tcPr>
+                </a:tc>
+                <a:tc>
+                  <a:txBody>
+                    <a:bodyPr/>
+                    <a:lstStyle/>
+                    <a:p>
+                      <a:pPr algn="ctr">
+                        <a:defRPr sz="1000" b="1">
+                          <a:solidFill>
+                            <a:srgbClr val="FFFFFF"/>
+                          </a:solidFill>
+                        </a:defRPr>
+                      </a:pPr>
+                      <a:r>
+                        <a:t>Permutaciones</a:t>
+                      </a:r>
+                    </a:p>
+                  </a:txBody>
+                  <a:tcPr>
+                    <a:solidFill>
+                      <a:srgbClr val="0F172A"/>
+                    </a:solidFill>
+                  </a:tcPr>
+                </a:tc>
+                <a:tc>
+                  <a:txBody>
+                    <a:bodyPr/>
+                    <a:lstStyle/>
+                    <a:p>
+                      <a:pPr algn="ctr">
+                        <a:defRPr sz="1000" b="1">
+                          <a:solidFill>
+                            <a:srgbClr val="FFFFFF"/>
+                          </a:solidFill>
+                        </a:defRPr>
+                      </a:pPr>
+                      <a:r>
+                        <a:t>Control (C*)</a:t>
+                      </a:r>
+                    </a:p>
+                  </a:txBody>
+                  <a:tcPr>
+                    <a:solidFill>
+                      <a:srgbClr val="0F172A"/>
+                    </a:solidFill>
+                  </a:tcPr>
+                </a:tc>
+                <a:tc>
+                  <a:txBody>
+                    <a:bodyPr/>
+                    <a:lstStyle/>
+                    <a:p>
+                      <a:pPr algn="ctr">
+                        <a:defRPr sz="1000" b="1">
+                          <a:solidFill>
+                            <a:srgbClr val="FFFFFF"/>
+                          </a:solidFill>
+                        </a:defRPr>
+                      </a:pPr>
+                      <a:r>
+                        <a:t>Solver Clásico</a:t>
+                      </a:r>
+                    </a:p>
+                  </a:txBody>
+                  <a:tcPr>
+                    <a:solidFill>
+                      <a:srgbClr val="0F172A"/>
+                    </a:solidFill>
+                  </a:tcPr>
+                </a:tc>
+                <a:tc>
+                  <a:txBody>
+                    <a:bodyPr/>
+                    <a:lstStyle/>
+                    <a:p>
+                      <a:pPr algn="ctr">
+                        <a:defRPr sz="1000" b="1">
+                          <a:solidFill>
+                            <a:srgbClr val="FFFFFF"/>
+                          </a:solidFill>
+                        </a:defRPr>
+                      </a:pPr>
+                      <a:r>
+                        <a:t>NODUX (Qiskit)</a:t>
+                      </a:r>
+                    </a:p>
+                  </a:txBody>
+                  <a:tcPr>
+                    <a:solidFill>
+                      <a:srgbClr val="0F172A"/>
+                    </a:solidFill>
+                  </a:tcPr>
+                </a:tc>
+                <a:tc>
+                  <a:txBody>
+                    <a:bodyPr/>
+                    <a:lstStyle/>
+                    <a:p>
+                      <a:pPr algn="ctr">
+                        <a:defRPr sz="1000" b="1">
+                          <a:solidFill>
+                            <a:srgbClr val="FFFFFF"/>
+                          </a:solidFill>
+                        </a:defRPr>
+                      </a:pPr>
+                      <a:r>
+                        <a:t>Brecha (Gap)</a:t>
+                      </a:r>
+                    </a:p>
+                  </a:txBody>
+                  <a:tcPr>
+                    <a:solidFill>
+                      <a:srgbClr val="0F172A"/>
+                    </a:solidFill>
+                  </a:tcPr>
+                </a:tc>
+                <a:tc>
+                  <a:txBody>
+                    <a:bodyPr/>
+                    <a:lstStyle/>
+                    <a:p>
+                      <a:pPr algn="ctr">
+                        <a:defRPr sz="1000" b="1">
+                          <a:solidFill>
+                            <a:srgbClr val="FFFFFF"/>
+                          </a:solidFill>
+                        </a:defRPr>
+                      </a:pPr>
+                      <a:r>
+                        <a:t>Factibilidad</a:t>
+                      </a:r>
+                    </a:p>
+                  </a:txBody>
+                  <a:tcPr>
+                    <a:solidFill>
+                      <a:srgbClr val="0F172A"/>
+                    </a:solidFill>
+                  </a:tcPr>
+                </a:tc>
+                <a:tc>
+                  <a:txBody>
+                    <a:bodyPr/>
+                    <a:lstStyle/>
+                    <a:p>
+                      <a:pPr algn="ctr">
+                        <a:defRPr sz="1000" b="1">
+                          <a:solidFill>
+                            <a:srgbClr val="FFFFFF"/>
+                          </a:solidFill>
+                        </a:defRPr>
+                      </a:pPr>
+                      <a:r>
+                        <a:t>Tiempo</a:t>
+                      </a:r>
+                    </a:p>
+                  </a:txBody>
+                  <a:tcPr>
+                    <a:solidFill>
+                      <a:srgbClr val="0F172A"/>
+                    </a:solidFill>
+                  </a:tcPr>
+                </a:tc>
+              </a:tr>
+              <a:tr h="518160">
+                <a:tc>
+                  <a:txBody>
+                    <a:bodyPr/>
+                    <a:lstStyle/>
+                    <a:p>
+                      <a:pPr algn="l">
+                        <a:defRPr sz="1000">
+                          <a:solidFill>
+                            <a:srgbClr val="1E293B"/>
+                          </a:solidFill>
+                          <a:latin typeface="Segoe UI"/>
+                        </a:defRPr>
+                      </a:pPr>
+                      <a:r>
+                        <a:t>N = 3 (Control)</a:t>
+                      </a:r>
+                    </a:p>
+                  </a:txBody>
+                  <a:tcPr>
+                    <a:solidFill>
+                      <a:srgbClr val="FFFFFF"/>
+                    </a:solidFill>
+                  </a:tcPr>
+                </a:tc>
+                <a:tc>
+                  <a:txBody>
+                    <a:bodyPr/>
+                    <a:lstStyle/>
+                    <a:p>
+                      <a:pPr algn="ctr">
+                        <a:defRPr sz="1000">
+                          <a:solidFill>
+                            <a:srgbClr val="1E293B"/>
+                          </a:solidFill>
+                          <a:latin typeface="Segoe UI"/>
+                        </a:defRPr>
+                      </a:pPr>
+                      <a:r>
+                        <a:t>9 q</a:t>
+                      </a:r>
+                    </a:p>
+                  </a:txBody>
+                  <a:tcPr>
+                    <a:solidFill>
+                      <a:srgbClr val="FFFFFF"/>
+                    </a:solidFill>
+                  </a:tcPr>
+                </a:tc>
+                <a:tc>
+                  <a:txBody>
+                    <a:bodyPr/>
+                    <a:lstStyle/>
+                    <a:p>
+                      <a:pPr algn="ctr">
+                        <a:defRPr sz="1000">
+                          <a:solidFill>
+                            <a:srgbClr val="1E293B"/>
+                          </a:solidFill>
+                          <a:latin typeface="Segoe UI"/>
+                        </a:defRPr>
+                      </a:pPr>
+                      <a:r>
+                        <a:t>6 (3!)</a:t>
+                      </a:r>
+                    </a:p>
+                  </a:txBody>
+                  <a:tcPr>
+                    <a:solidFill>
+                      <a:srgbClr val="FFFFFF"/>
+                    </a:solidFill>
+                  </a:tcPr>
+                </a:tc>
+                <a:tc>
+                  <a:txBody>
+                    <a:bodyPr/>
+                    <a:lstStyle/>
+                    <a:p>
+                      <a:pPr algn="ctr">
+                        <a:defRPr sz="1000">
+                          <a:solidFill>
+                            <a:srgbClr val="1E293B"/>
+                          </a:solidFill>
+                          <a:latin typeface="Segoe UI"/>
+                        </a:defRPr>
+                      </a:pPr>
+                      <a:r>
+                        <a:t>24.0</a:t>
+                      </a:r>
+                    </a:p>
+                  </a:txBody>
+                  <a:tcPr>
+                    <a:solidFill>
+                      <a:srgbClr val="FFFFFF"/>
+                    </a:solidFill>
+                  </a:tcPr>
+                </a:tc>
+                <a:tc>
+                  <a:txBody>
+                    <a:bodyPr/>
+                    <a:lstStyle/>
+                    <a:p>
+                      <a:pPr algn="ctr">
+                        <a:defRPr sz="1000">
+                          <a:solidFill>
+                            <a:srgbClr val="1E293B"/>
+                          </a:solidFill>
+                          <a:latin typeface="Segoe UI"/>
+                        </a:defRPr>
+                      </a:pPr>
+                      <a:r>
+                        <a:t>24.0 (0.0001s)</a:t>
+                      </a:r>
+                    </a:p>
+                  </a:txBody>
+                  <a:tcPr>
+                    <a:solidFill>
+                      <a:srgbClr val="FFFFFF"/>
+                    </a:solidFill>
+                  </a:tcPr>
+                </a:tc>
+                <a:tc>
+                  <a:txBody>
+                    <a:bodyPr/>
+                    <a:lstStyle/>
+                    <a:p>
+                      <a:pPr algn="ctr">
+                        <a:defRPr sz="1000">
+                          <a:solidFill>
+                            <a:srgbClr val="1E293B"/>
+                          </a:solidFill>
+                          <a:latin typeface="Segoe UI"/>
+                        </a:defRPr>
+                      </a:pPr>
+                      <a:r>
+                        <a:t>24.0 (QAOA)</a:t>
+                      </a:r>
+                    </a:p>
+                  </a:txBody>
+                  <a:tcPr>
+                    <a:solidFill>
+                      <a:srgbClr val="FFFFFF"/>
+                    </a:solidFill>
+                  </a:tcPr>
+                </a:tc>
+                <a:tc>
+                  <a:txBody>
+                    <a:bodyPr/>
+                    <a:lstStyle/>
+                    <a:p>
+                      <a:pPr algn="ctr">
+                        <a:defRPr sz="1000">
+                          <a:solidFill>
+                            <a:srgbClr val="1E293B"/>
+                          </a:solidFill>
+                          <a:latin typeface="Segoe UI"/>
+                        </a:defRPr>
+                      </a:pPr>
+                      <a:r>
+                        <a:t>0.00% (Óptimo)</a:t>
+                      </a:r>
+                    </a:p>
+                  </a:txBody>
+                  <a:tcPr>
+                    <a:solidFill>
+                      <a:srgbClr val="FFFFFF"/>
+                    </a:solidFill>
+                  </a:tcPr>
+                </a:tc>
+                <a:tc>
+                  <a:txBody>
+                    <a:bodyPr/>
+                    <a:lstStyle/>
+                    <a:p>
+                      <a:pPr algn="ctr">
+                        <a:defRPr sz="1000">
+                          <a:solidFill>
+                            <a:srgbClr val="1E293B"/>
+                          </a:solidFill>
+                          <a:latin typeface="Segoe UI"/>
+                        </a:defRPr>
+                      </a:pPr>
+                      <a:r>
+                        <a:t>100.0%</a:t>
+                      </a:r>
+                    </a:p>
+                  </a:txBody>
+                  <a:tcPr>
+                    <a:solidFill>
+                      <a:srgbClr val="FFFFFF"/>
+                    </a:solidFill>
+                  </a:tcPr>
+                </a:tc>
+                <a:tc>
+                  <a:txBody>
+                    <a:bodyPr/>
+                    <a:lstStyle/>
+                    <a:p>
+                      <a:pPr algn="ctr">
+                        <a:defRPr sz="1000">
+                          <a:solidFill>
+                            <a:srgbClr val="1E293B"/>
+                          </a:solidFill>
+                          <a:latin typeface="Segoe UI"/>
+                        </a:defRPr>
+                      </a:pPr>
+                      <a:r>
+                        <a:t>0.12 s</a:t>
+                      </a:r>
+                    </a:p>
+                  </a:txBody>
+                  <a:tcPr>
+                    <a:solidFill>
+                      <a:srgbClr val="FFFFFF"/>
+                    </a:solidFill>
+                  </a:tcPr>
+                </a:tc>
+              </a:tr>
+              <a:tr h="518160">
+                <a:tc>
+                  <a:txBody>
+                    <a:bodyPr/>
+                    <a:lstStyle/>
+                    <a:p>
+                      <a:pPr algn="l">
+                        <a:defRPr sz="1000">
+                          <a:solidFill>
+                            <a:srgbClr val="1E293B"/>
+                          </a:solidFill>
+                          <a:latin typeface="Segoe UI"/>
+                        </a:defRPr>
+                      </a:pPr>
+                      <a:r>
+                        <a:t>N = 4 (Control)</a:t>
+                      </a:r>
+                    </a:p>
+                  </a:txBody>
+                  <a:tcPr>
+                    <a:solidFill>
+                      <a:srgbClr val="F8FAFC"/>
+                    </a:solidFill>
+                  </a:tcPr>
+                </a:tc>
+                <a:tc>
+                  <a:txBody>
+                    <a:bodyPr/>
+                    <a:lstStyle/>
+                    <a:p>
+                      <a:pPr algn="ctr">
+                        <a:defRPr sz="1000">
+                          <a:solidFill>
+                            <a:srgbClr val="1E293B"/>
+                          </a:solidFill>
+                          <a:latin typeface="Segoe UI"/>
+                        </a:defRPr>
+                      </a:pPr>
+                      <a:r>
+                        <a:t>16 q</a:t>
+                      </a:r>
+                    </a:p>
+                  </a:txBody>
+                  <a:tcPr>
+                    <a:solidFill>
+                      <a:srgbClr val="F8FAFC"/>
+                    </a:solidFill>
+                  </a:tcPr>
+                </a:tc>
+                <a:tc>
+                  <a:txBody>
+                    <a:bodyPr/>
+                    <a:lstStyle/>
+                    <a:p>
+                      <a:pPr algn="ctr">
+                        <a:defRPr sz="1000">
+                          <a:solidFill>
+                            <a:srgbClr val="1E293B"/>
+                          </a:solidFill>
+                          <a:latin typeface="Segoe UI"/>
+                        </a:defRPr>
+                      </a:pPr>
+                      <a:r>
+                        <a:t>24 (4!)</a:t>
+                      </a:r>
+                    </a:p>
+                  </a:txBody>
+                  <a:tcPr>
+                    <a:solidFill>
+                      <a:srgbClr val="F8FAFC"/>
+                    </a:solidFill>
+                  </a:tcPr>
+                </a:tc>
+                <a:tc>
+                  <a:txBody>
+                    <a:bodyPr/>
+                    <a:lstStyle/>
+                    <a:p>
+                      <a:pPr algn="ctr">
+                        <a:defRPr sz="1000">
+                          <a:solidFill>
+                            <a:srgbClr val="1E293B"/>
+                          </a:solidFill>
+                          <a:latin typeface="Segoe UI"/>
+                        </a:defRPr>
+                      </a:pPr>
+                      <a:r>
+                        <a:t>32.0</a:t>
+                      </a:r>
+                    </a:p>
+                  </a:txBody>
+                  <a:tcPr>
+                    <a:solidFill>
+                      <a:srgbClr val="F8FAFC"/>
+                    </a:solidFill>
+                  </a:tcPr>
+                </a:tc>
+                <a:tc>
+                  <a:txBody>
+                    <a:bodyPr/>
+                    <a:lstStyle/>
+                    <a:p>
+                      <a:pPr algn="ctr">
+                        <a:defRPr sz="1000">
+                          <a:solidFill>
+                            <a:srgbClr val="1E293B"/>
+                          </a:solidFill>
+                          <a:latin typeface="Segoe UI"/>
+                        </a:defRPr>
+                      </a:pPr>
+                      <a:r>
+                        <a:t>32.0 (0.0001s)</a:t>
+                      </a:r>
+                    </a:p>
+                  </a:txBody>
+                  <a:tcPr>
+                    <a:solidFill>
+                      <a:srgbClr val="F8FAFC"/>
+                    </a:solidFill>
+                  </a:tcPr>
+                </a:tc>
+                <a:tc>
+                  <a:txBody>
+                    <a:bodyPr/>
+                    <a:lstStyle/>
+                    <a:p>
+                      <a:pPr algn="ctr">
+                        <a:defRPr sz="1000">
+                          <a:solidFill>
+                            <a:srgbClr val="1E293B"/>
+                          </a:solidFill>
+                          <a:latin typeface="Segoe UI"/>
+                        </a:defRPr>
+                      </a:pPr>
+                      <a:r>
+                        <a:t>32.0 (QAOA)</a:t>
+                      </a:r>
+                    </a:p>
+                  </a:txBody>
+                  <a:tcPr>
+                    <a:solidFill>
+                      <a:srgbClr val="F8FAFC"/>
+                    </a:solidFill>
+                  </a:tcPr>
+                </a:tc>
+                <a:tc>
+                  <a:txBody>
+                    <a:bodyPr/>
+                    <a:lstStyle/>
+                    <a:p>
+                      <a:pPr algn="ctr">
+                        <a:defRPr sz="1000">
+                          <a:solidFill>
+                            <a:srgbClr val="1E293B"/>
+                          </a:solidFill>
+                          <a:latin typeface="Segoe UI"/>
+                        </a:defRPr>
+                      </a:pPr>
+                      <a:r>
+                        <a:t>0.00% (Óptimo)</a:t>
+                      </a:r>
+                    </a:p>
+                  </a:txBody>
+                  <a:tcPr>
+                    <a:solidFill>
+                      <a:srgbClr val="F8FAFC"/>
+                    </a:solidFill>
+                  </a:tcPr>
+                </a:tc>
+                <a:tc>
+                  <a:txBody>
+                    <a:bodyPr/>
+                    <a:lstStyle/>
+                    <a:p>
+                      <a:pPr algn="ctr">
+                        <a:defRPr sz="1000">
+                          <a:solidFill>
+                            <a:srgbClr val="1E293B"/>
+                          </a:solidFill>
+                          <a:latin typeface="Segoe UI"/>
+                        </a:defRPr>
+                      </a:pPr>
+                      <a:r>
+                        <a:t>100.0%</a:t>
+                      </a:r>
+                    </a:p>
+                  </a:txBody>
+                  <a:tcPr>
+                    <a:solidFill>
+                      <a:srgbClr val="F8FAFC"/>
+                    </a:solidFill>
+                  </a:tcPr>
+                </a:tc>
+                <a:tc>
+                  <a:txBody>
+                    <a:bodyPr/>
+                    <a:lstStyle/>
+                    <a:p>
+                      <a:pPr algn="ctr">
+                        <a:defRPr sz="1000">
+                          <a:solidFill>
+                            <a:srgbClr val="1E293B"/>
+                          </a:solidFill>
+                          <a:latin typeface="Segoe UI"/>
+                        </a:defRPr>
+                      </a:pPr>
+                      <a:r>
+                        <a:t>5.86 s</a:t>
+                      </a:r>
+                    </a:p>
+                  </a:txBody>
+                  <a:tcPr>
+                    <a:solidFill>
+                      <a:srgbClr val="F8FAFC"/>
+                    </a:solidFill>
+                  </a:tcPr>
+                </a:tc>
+              </a:tr>
+              <a:tr h="518160">
+                <a:tc>
+                  <a:txBody>
+                    <a:bodyPr/>
+                    <a:lstStyle/>
+                    <a:p>
+                      <a:pPr algn="l">
+                        <a:defRPr sz="1000">
+                          <a:solidFill>
+                            <a:srgbClr val="1E293B"/>
+                          </a:solidFill>
+                          <a:latin typeface="Segoe UI"/>
+                        </a:defRPr>
+                      </a:pPr>
+                      <a:r>
+                        <a:t>N = 10 (Greedy)</a:t>
+                      </a:r>
+                    </a:p>
+                  </a:txBody>
+                  <a:tcPr>
+                    <a:solidFill>
+                      <a:srgbClr val="FFFFFF"/>
+                    </a:solidFill>
+                  </a:tcPr>
+                </a:tc>
+                <a:tc>
+                  <a:txBody>
+                    <a:bodyPr/>
+                    <a:lstStyle/>
+                    <a:p>
+                      <a:pPr algn="ctr">
+                        <a:defRPr sz="1000">
+                          <a:solidFill>
+                            <a:srgbClr val="1E293B"/>
+                          </a:solidFill>
+                          <a:latin typeface="Segoe UI"/>
+                        </a:defRPr>
+                      </a:pPr>
+                      <a:r>
+                        <a:t>—</a:t>
+                      </a:r>
+                    </a:p>
+                  </a:txBody>
+                  <a:tcPr>
+                    <a:solidFill>
+                      <a:srgbClr val="FFFFFF"/>
+                    </a:solidFill>
+                  </a:tcPr>
+                </a:tc>
+                <a:tc>
+                  <a:txBody>
+                    <a:bodyPr/>
+                    <a:lstStyle/>
+                    <a:p>
+                      <a:pPr algn="ctr">
+                        <a:defRPr sz="1000">
+                          <a:solidFill>
+                            <a:srgbClr val="1E293B"/>
+                          </a:solidFill>
+                          <a:latin typeface="Segoe UI"/>
+                        </a:defRPr>
+                      </a:pPr>
+                      <a:r>
+                        <a:t>3,628,800</a:t>
+                      </a:r>
+                    </a:p>
+                  </a:txBody>
+                  <a:tcPr>
+                    <a:solidFill>
+                      <a:srgbClr val="FFFFFF"/>
+                    </a:solidFill>
+                  </a:tcPr>
+                </a:tc>
+                <a:tc>
+                  <a:txBody>
+                    <a:bodyPr/>
+                    <a:lstStyle/>
+                    <a:p>
+                      <a:pPr algn="ctr">
+                        <a:defRPr sz="1000">
+                          <a:solidFill>
+                            <a:srgbClr val="1E293B"/>
+                          </a:solidFill>
+                          <a:latin typeface="Segoe UI"/>
+                        </a:defRPr>
+                      </a:pPr>
+                      <a:r>
+                        <a:t>340.0</a:t>
+                      </a:r>
+                    </a:p>
+                  </a:txBody>
+                  <a:tcPr>
+                    <a:solidFill>
+                      <a:srgbClr val="FFFFFF"/>
+                    </a:solidFill>
+                  </a:tcPr>
+                </a:tc>
+                <a:tc>
+                  <a:txBody>
+                    <a:bodyPr/>
+                    <a:lstStyle/>
+                    <a:p>
+                      <a:pPr algn="ctr">
+                        <a:defRPr sz="1000">
+                          <a:solidFill>
+                            <a:srgbClr val="1E293B"/>
+                          </a:solidFill>
+                          <a:latin typeface="Segoe UI"/>
+                        </a:defRPr>
+                      </a:pPr>
+                      <a:r>
+                        <a:t>466.0 (0.002s)</a:t>
+                      </a:r>
+                    </a:p>
+                  </a:txBody>
+                  <a:tcPr>
+                    <a:solidFill>
+                      <a:srgbClr val="FFFFFF"/>
+                    </a:solidFill>
+                  </a:tcPr>
+                </a:tc>
+                <a:tc>
+                  <a:txBody>
+                    <a:bodyPr/>
+                    <a:lstStyle/>
+                    <a:p>
+                      <a:pPr algn="ctr">
+                        <a:defRPr sz="1000">
+                          <a:solidFill>
+                            <a:srgbClr val="1E293B"/>
+                          </a:solidFill>
+                          <a:latin typeface="Segoe UI"/>
+                        </a:defRPr>
+                      </a:pPr>
+                      <a:r>
+                        <a:t>—</a:t>
+                      </a:r>
+                    </a:p>
+                  </a:txBody>
+                  <a:tcPr>
+                    <a:solidFill>
+                      <a:srgbClr val="FFFFFF"/>
+                    </a:solidFill>
+                  </a:tcPr>
+                </a:tc>
+                <a:tc>
+                  <a:txBody>
+                    <a:bodyPr/>
+                    <a:lstStyle/>
+                    <a:p>
+                      <a:pPr algn="ctr">
+                        <a:defRPr sz="1000">
+                          <a:solidFill>
+                            <a:srgbClr val="1E293B"/>
+                          </a:solidFill>
+                          <a:latin typeface="Segoe UI"/>
+                        </a:defRPr>
+                      </a:pPr>
+                      <a:r>
+                        <a:t>+37.06%</a:t>
+                      </a:r>
+                    </a:p>
+                  </a:txBody>
+                  <a:tcPr>
+                    <a:solidFill>
+                      <a:srgbClr val="FFFFFF"/>
+                    </a:solidFill>
+                  </a:tcPr>
+                </a:tc>
+                <a:tc>
+                  <a:txBody>
+                    <a:bodyPr/>
+                    <a:lstStyle/>
+                    <a:p>
+                      <a:pPr algn="ctr">
+                        <a:defRPr sz="1000">
+                          <a:solidFill>
+                            <a:srgbClr val="1E293B"/>
+                          </a:solidFill>
+                          <a:latin typeface="Segoe UI"/>
+                        </a:defRPr>
+                      </a:pPr>
+                      <a:r>
+                        <a:t>100.0%</a:t>
+                      </a:r>
+                    </a:p>
+                  </a:txBody>
+                  <a:tcPr>
+                    <a:solidFill>
+                      <a:srgbClr val="FFFFFF"/>
+                    </a:solidFill>
+                  </a:tcPr>
+                </a:tc>
+                <a:tc>
+                  <a:txBody>
+                    <a:bodyPr/>
+                    <a:lstStyle/>
+                    <a:p>
+                      <a:pPr algn="ctr">
+                        <a:defRPr sz="1000">
+                          <a:solidFill>
+                            <a:srgbClr val="1E293B"/>
+                          </a:solidFill>
+                          <a:latin typeface="Segoe UI"/>
+                        </a:defRPr>
+                      </a:pPr>
+                      <a:r>
+                        <a:t>0.002 s</a:t>
+                      </a:r>
+                    </a:p>
+                  </a:txBody>
+                  <a:tcPr>
+                    <a:solidFill>
+                      <a:srgbClr val="FFFFFF"/>
+                    </a:solidFill>
+                  </a:tcPr>
+                </a:tc>
+              </a:tr>
+              <a:tr h="518160">
+                <a:tc>
+                  <a:txBody>
+                    <a:bodyPr/>
+                    <a:lstStyle/>
+                    <a:p>
+                      <a:pPr algn="l">
+                        <a:defRPr sz="1000">
+                          <a:solidFill>
+                            <a:srgbClr val="1E293B"/>
+                          </a:solidFill>
+                          <a:latin typeface="Segoe UI"/>
+                        </a:defRPr>
+                      </a:pPr>
+                      <a:r>
+                        <a:t>N = 10 (2-Opt)</a:t>
+                      </a:r>
+                    </a:p>
+                  </a:txBody>
+                  <a:tcPr>
+                    <a:solidFill>
+                      <a:srgbClr val="F8FAFC"/>
+                    </a:solidFill>
+                  </a:tcPr>
+                </a:tc>
+                <a:tc>
+                  <a:txBody>
+                    <a:bodyPr/>
+                    <a:lstStyle/>
+                    <a:p>
+                      <a:pPr algn="ctr">
+                        <a:defRPr sz="1000">
+                          <a:solidFill>
+                            <a:srgbClr val="1E293B"/>
+                          </a:solidFill>
+                          <a:latin typeface="Segoe UI"/>
+                        </a:defRPr>
+                      </a:pPr>
+                      <a:r>
+                        <a:t>—</a:t>
+                      </a:r>
+                    </a:p>
+                  </a:txBody>
+                  <a:tcPr>
+                    <a:solidFill>
+                      <a:srgbClr val="F8FAFC"/>
+                    </a:solidFill>
+                  </a:tcPr>
+                </a:tc>
+                <a:tc>
+                  <a:txBody>
+                    <a:bodyPr/>
+                    <a:lstStyle/>
+                    <a:p>
+                      <a:pPr algn="ctr">
+                        <a:defRPr sz="1000">
+                          <a:solidFill>
+                            <a:srgbClr val="1E293B"/>
+                          </a:solidFill>
+                          <a:latin typeface="Segoe UI"/>
+                        </a:defRPr>
+                      </a:pPr>
+                      <a:r>
+                        <a:t>3,628,800</a:t>
+                      </a:r>
+                    </a:p>
+                  </a:txBody>
+                  <a:tcPr>
+                    <a:solidFill>
+                      <a:srgbClr val="F8FAFC"/>
+                    </a:solidFill>
+                  </a:tcPr>
+                </a:tc>
+                <a:tc>
+                  <a:txBody>
+                    <a:bodyPr/>
+                    <a:lstStyle/>
+                    <a:p>
+                      <a:pPr algn="ctr">
+                        <a:defRPr sz="1000">
+                          <a:solidFill>
+                            <a:srgbClr val="1E293B"/>
+                          </a:solidFill>
+                          <a:latin typeface="Segoe UI"/>
+                        </a:defRPr>
+                      </a:pPr>
+                      <a:r>
+                        <a:t>340.0</a:t>
+                      </a:r>
+                    </a:p>
+                  </a:txBody>
+                  <a:tcPr>
+                    <a:solidFill>
+                      <a:srgbClr val="F8FAFC"/>
+                    </a:solidFill>
+                  </a:tcPr>
+                </a:tc>
+                <a:tc>
+                  <a:txBody>
+                    <a:bodyPr/>
+                    <a:lstStyle/>
+                    <a:p>
+                      <a:pPr algn="ctr">
+                        <a:defRPr sz="1000">
+                          <a:solidFill>
+                            <a:srgbClr val="1E293B"/>
+                          </a:solidFill>
+                          <a:latin typeface="Segoe UI"/>
+                        </a:defRPr>
+                      </a:pPr>
+                      <a:r>
+                        <a:t>372.0 (0.014s)</a:t>
+                      </a:r>
+                    </a:p>
+                  </a:txBody>
+                  <a:tcPr>
+                    <a:solidFill>
+                      <a:srgbClr val="F8FAFC"/>
+                    </a:solidFill>
+                  </a:tcPr>
+                </a:tc>
+                <a:tc>
+                  <a:txBody>
+                    <a:bodyPr/>
+                    <a:lstStyle/>
+                    <a:p>
+                      <a:pPr algn="ctr">
+                        <a:defRPr sz="1000">
+                          <a:solidFill>
+                            <a:srgbClr val="1E293B"/>
+                          </a:solidFill>
+                          <a:latin typeface="Segoe UI"/>
+                        </a:defRPr>
+                      </a:pPr>
+                      <a:r>
+                        <a:t>—</a:t>
+                      </a:r>
+                    </a:p>
+                  </a:txBody>
+                  <a:tcPr>
+                    <a:solidFill>
+                      <a:srgbClr val="F8FAFC"/>
+                    </a:solidFill>
+                  </a:tcPr>
+                </a:tc>
+                <a:tc>
+                  <a:txBody>
+                    <a:bodyPr/>
+                    <a:lstStyle/>
+                    <a:p>
+                      <a:pPr algn="ctr">
+                        <a:defRPr sz="1000">
+                          <a:solidFill>
+                            <a:srgbClr val="1E293B"/>
+                          </a:solidFill>
+                          <a:latin typeface="Segoe UI"/>
+                        </a:defRPr>
+                      </a:pPr>
+                      <a:r>
+                        <a:t>+9.41%</a:t>
+                      </a:r>
+                    </a:p>
+                  </a:txBody>
+                  <a:tcPr>
+                    <a:solidFill>
+                      <a:srgbClr val="F8FAFC"/>
+                    </a:solidFill>
+                  </a:tcPr>
+                </a:tc>
+                <a:tc>
+                  <a:txBody>
+                    <a:bodyPr/>
+                    <a:lstStyle/>
+                    <a:p>
+                      <a:pPr algn="ctr">
+                        <a:defRPr sz="1000">
+                          <a:solidFill>
+                            <a:srgbClr val="1E293B"/>
+                          </a:solidFill>
+                          <a:latin typeface="Segoe UI"/>
+                        </a:defRPr>
+                      </a:pPr>
+                      <a:r>
+                        <a:t>100.0%</a:t>
+                      </a:r>
+                    </a:p>
+                  </a:txBody>
+                  <a:tcPr>
+                    <a:solidFill>
+                      <a:srgbClr val="F8FAFC"/>
+                    </a:solidFill>
+                  </a:tcPr>
+                </a:tc>
+                <a:tc>
+                  <a:txBody>
+                    <a:bodyPr/>
+                    <a:lstStyle/>
+                    <a:p>
+                      <a:pPr algn="ctr">
+                        <a:defRPr sz="1000">
+                          <a:solidFill>
+                            <a:srgbClr val="1E293B"/>
+                          </a:solidFill>
+                          <a:latin typeface="Segoe UI"/>
+                        </a:defRPr>
+                      </a:pPr>
+                      <a:r>
+                        <a:t>0.014 s</a:t>
+                      </a:r>
+                    </a:p>
+                  </a:txBody>
+                  <a:tcPr>
+                    <a:solidFill>
+                      <a:srgbClr val="F8FAFC"/>
+                    </a:solidFill>
+                  </a:tcPr>
+                </a:tc>
+              </a:tr>
+              <a:tr h="518160">
+                <a:tc>
+                  <a:txBody>
+                    <a:bodyPr/>
+                    <a:lstStyle/>
+                    <a:p>
+                      <a:pPr algn="l">
+                        <a:defRPr sz="1000" b="1">
+                          <a:solidFill>
+                            <a:srgbClr val="0F172A"/>
+                          </a:solidFill>
+                          <a:latin typeface="Segoe UI"/>
+                        </a:defRPr>
+                      </a:pPr>
+                      <a:r>
+                        <a:t>N = 10 (Q-LNS)</a:t>
+                      </a:r>
+                    </a:p>
+                  </a:txBody>
+                  <a:tcPr>
+                    <a:solidFill>
+                      <a:srgbClr val="ECFDF5"/>
+                    </a:solidFill>
+                  </a:tcPr>
+                </a:tc>
+                <a:tc>
+                  <a:txBody>
+                    <a:bodyPr/>
+                    <a:lstStyle/>
+                    <a:p>
+                      <a:pPr algn="ctr">
+                        <a:defRPr sz="1000" b="1">
+                          <a:solidFill>
+                            <a:srgbClr val="0F172A"/>
+                          </a:solidFill>
+                          <a:latin typeface="Segoe UI"/>
+                        </a:defRPr>
+                      </a:pPr>
+                      <a:r>
+                        <a:t>9 q (core)</a:t>
+                      </a:r>
+                    </a:p>
+                  </a:txBody>
+                  <a:tcPr>
+                    <a:solidFill>
+                      <a:srgbClr val="ECFDF5"/>
+                    </a:solidFill>
+                  </a:tcPr>
+                </a:tc>
+                <a:tc>
+                  <a:txBody>
+                    <a:bodyPr/>
+                    <a:lstStyle/>
+                    <a:p>
+                      <a:pPr algn="ctr">
+                        <a:defRPr sz="1000" b="1">
+                          <a:solidFill>
+                            <a:srgbClr val="0F172A"/>
+                          </a:solidFill>
+                          <a:latin typeface="Segoe UI"/>
+                        </a:defRPr>
+                      </a:pPr>
+                      <a:r>
+                        <a:t>3,628,800</a:t>
+                      </a:r>
+                    </a:p>
+                  </a:txBody>
+                  <a:tcPr>
+                    <a:solidFill>
+                      <a:srgbClr val="ECFDF5"/>
+                    </a:solidFill>
+                  </a:tcPr>
+                </a:tc>
+                <a:tc>
+                  <a:txBody>
+                    <a:bodyPr/>
+                    <a:lstStyle/>
+                    <a:p>
+                      <a:pPr algn="ctr">
+                        <a:defRPr sz="1000" b="1">
+                          <a:solidFill>
+                            <a:srgbClr val="0F172A"/>
+                          </a:solidFill>
+                          <a:latin typeface="Segoe UI"/>
+                        </a:defRPr>
+                      </a:pPr>
+                      <a:r>
+                        <a:t>340.0</a:t>
+                      </a:r>
+                    </a:p>
+                  </a:txBody>
+                  <a:tcPr>
+                    <a:solidFill>
+                      <a:srgbClr val="ECFDF5"/>
+                    </a:solidFill>
+                  </a:tcPr>
+                </a:tc>
+                <a:tc>
+                  <a:txBody>
+                    <a:bodyPr/>
+                    <a:lstStyle/>
+                    <a:p>
+                      <a:pPr algn="ctr">
+                        <a:defRPr sz="1000" b="1">
+                          <a:solidFill>
+                            <a:srgbClr val="0F172A"/>
+                          </a:solidFill>
+                          <a:latin typeface="Segoe UI"/>
+                        </a:defRPr>
+                      </a:pPr>
+                      <a:r>
+                        <a:t>—</a:t>
+                      </a:r>
+                    </a:p>
+                  </a:txBody>
+                  <a:tcPr>
+                    <a:solidFill>
+                      <a:srgbClr val="ECFDF5"/>
+                    </a:solidFill>
+                  </a:tcPr>
+                </a:tc>
+                <a:tc>
+                  <a:txBody>
+                    <a:bodyPr/>
+                    <a:lstStyle/>
+                    <a:p>
+                      <a:pPr algn="ctr">
+                        <a:defRPr sz="1000" b="1">
+                          <a:solidFill>
+                            <a:srgbClr val="059669"/>
+                          </a:solidFill>
+                          <a:latin typeface="Segoe UI"/>
+                        </a:defRPr>
+                      </a:pPr>
+                      <a:r>
+                        <a:t>350.0 (Q-LNS)</a:t>
+                      </a:r>
+                    </a:p>
+                  </a:txBody>
+                  <a:tcPr>
+                    <a:solidFill>
+                      <a:srgbClr val="ECFDF5"/>
+                    </a:solidFill>
+                  </a:tcPr>
+                </a:tc>
+                <a:tc>
+                  <a:txBody>
+                    <a:bodyPr/>
+                    <a:lstStyle/>
+                    <a:p>
+                      <a:pPr algn="ctr">
+                        <a:defRPr sz="1000" b="1">
+                          <a:solidFill>
+                            <a:srgbClr val="059669"/>
+                          </a:solidFill>
+                          <a:latin typeface="Segoe UI"/>
+                        </a:defRPr>
+                      </a:pPr>
+                      <a:r>
+                        <a:t>+2.94%</a:t>
+                      </a:r>
+                    </a:p>
+                  </a:txBody>
+                  <a:tcPr>
+                    <a:solidFill>
+                      <a:srgbClr val="ECFDF5"/>
+                    </a:solidFill>
+                  </a:tcPr>
+                </a:tc>
+                <a:tc>
+                  <a:txBody>
+                    <a:bodyPr/>
+                    <a:lstStyle/>
+                    <a:p>
+                      <a:pPr algn="ctr">
+                        <a:defRPr sz="1000" b="1">
+                          <a:solidFill>
+                            <a:srgbClr val="0F172A"/>
+                          </a:solidFill>
+                          <a:latin typeface="Segoe UI"/>
+                        </a:defRPr>
+                      </a:pPr>
+                      <a:r>
+                        <a:t>100.0%</a:t>
+                      </a:r>
+                    </a:p>
+                  </a:txBody>
+                  <a:tcPr>
+                    <a:solidFill>
+                      <a:srgbClr val="ECFDF5"/>
+                    </a:solidFill>
+                  </a:tcPr>
+                </a:tc>
+                <a:tc>
+                  <a:txBody>
+                    <a:bodyPr/>
+                    <a:lstStyle/>
+                    <a:p>
+                      <a:pPr algn="ctr">
+                        <a:defRPr sz="1000" b="1">
+                          <a:solidFill>
+                            <a:srgbClr val="0F172A"/>
+                          </a:solidFill>
+                          <a:latin typeface="Segoe UI"/>
+                        </a:defRPr>
+                      </a:pPr>
+                      <a:r>
+                        <a:t>1.80 s</a:t>
+                      </a:r>
+                    </a:p>
+                  </a:txBody>
+                  <a:tcPr>
+                    <a:solidFill>
+                      <a:srgbClr val="ECFDF5"/>
+                    </a:solidFill>
+                  </a:tcPr>
+                </a:tc>
+              </a:tr>
+            </a:tbl>
+          </a:graphicData>
+        </a:graphic>
+      </p:graphicFrame>
+      <p:sp>
+        <p:nvSpPr>
+          <p:cNvPr id="5" name="Rounded Rectangle 4"/>
+          <p:cNvSpPr/>
+          <p:nvPr/>
+        </p:nvSpPr>
+        <p:spPr>
+          <a:xfrm>
+            <a:off x="731520" y="4846320"/>
+            <a:ext cx="10728655" cy="1463040"/>
+          </a:xfrm>
+          <a:prstGeom prst="roundRect">
+            <a:avLst/>
+          </a:prstGeom>
+          <a:solidFill>
+            <a:srgbClr val="FFFFFF"/>
+          </a:solidFill>
+          <a:ln w="12700">
+            <a:solidFill>
+              <a:srgbClr val="E2E8F0"/>
+            </a:solidFill>
+          </a:ln>
+        </p:spPr>
+        <p:style>
+          <a:lnRef idx="1">
+            <a:schemeClr val="accent1"/>
+          </a:lnRef>
+          <a:fillRef idx="3">
+            <a:schemeClr val="accent1"/>
+          </a:fillRef>
+          <a:effectRef idx="2">
+            <a:schemeClr val="accent1"/>
+          </a:effectRef>
+          <a:fontRef idx="minor">
+            <a:schemeClr val="lt1"/>
+          </a:fontRef>
+        </p:style>
+        <p:txBody>
+          <a:bodyPr rtlCol="0" anchor="ctr"/>
+          <a:lstStyle/>
+          <a:p>
+            <a:pPr algn="ctr"/>
+          </a:p>
+        </p:txBody>
+      </p:sp>
+      <p:sp>
+        <p:nvSpPr>
+          <p:cNvPr id="6" name="TextBox 5"/>
           <p:cNvSpPr txBox="1"/>
           <p:nvPr/>
         </p:nvSpPr>
         <p:spPr>
           <a:xfrm>
-            <a:off x="731520" y="1554480"/>
-            <a:ext cx="5486400" cy="4572000"/>
+            <a:off x="914400" y="4983480"/>
+            <a:ext cx="10362895" cy="1188720"/>
           </a:xfrm>
           <a:prstGeom prst="rect">
             <a:avLst/>
@@ -3770,209 +6102,30 @@
           <a:lstStyle/>
           <a:p>
             <a:pPr>
-              <a:defRPr sz="1700" b="1">
-                <a:solidFill>
-                  <a:srgbClr val="0072CE"/>
-                </a:solidFill>
-              </a:defRPr>
-            </a:pPr>
-            <a:r>
-              <a:t>Descomposición Activa de Vecindarios Cuánticos</a:t>
-            </a:r>
-          </a:p>
-          <a:p>
-            <a:pPr>
-              <a:defRPr sz="1300" b="1">
+              <a:defRPr sz="1100" b="1">
+                <a:solidFill>
+                  <a:srgbClr val="1D4ED8"/>
+                </a:solidFill>
+              </a:defRPr>
+            </a:pPr>
+            <a:r>
+              <a:t>INTERPRETACIÓN CIENTÍFICA: UTILIDAD METODOLÓGICA Y SUPERACIÓN DE MÍNIMOS LOCALES</a:t>
+            </a:r>
+          </a:p>
+          <a:p>
+            <a:pPr>
+              <a:defRPr sz="1050">
                 <a:solidFill>
                   <a:srgbClr val="1E293B"/>
                 </a:solidFill>
               </a:defRPr>
             </a:pPr>
             <a:r>
-              <a:t>• Sin Cuántica por Relleno: </a:t>
-            </a:r>
-            <a:r>
-              <a:rPr b="0"/>
-              <a:t>Qiskit tiene un rol computacional sustantivo y no decorativo. No forzamos un circuito monolítico de 100 cúbits que sería ruido puro en NISQ.</a:t>
-            </a:r>
-          </a:p>
-          <a:p>
-            <a:pPr>
-              <a:defRPr sz="1300" b="1">
-                <a:solidFill>
-                  <a:srgbClr val="1E293B"/>
-                </a:solidFill>
-              </a:defRPr>
-            </a:pPr>
-            <a:r>
-              <a:t>• Descomposición Q-LNS: </a:t>
-            </a:r>
-            <a:r>
-              <a:rPr b="0"/>
-              <a:t>Seleccionamos vecindarios dinámicos de K=3 o K=4 elementos según su gradiente de flujo e interacción cuadrática.</a:t>
-            </a:r>
-          </a:p>
-          <a:p>
-            <a:pPr>
-              <a:defRPr sz="1300" b="1">
-                <a:solidFill>
-                  <a:srgbClr val="1E293B"/>
-                </a:solidFill>
-              </a:defRPr>
-            </a:pPr>
-            <a:r>
-              <a:t>• Sub-QUBO Inducido con Acoplamiento Lineal: </a:t>
-            </a:r>
-            <a:r>
-              <a:rPr b="0"/>
-              <a:t>Incorporamos la interacción interna entre elementos activos y el acoplamiento lineal exacto L_aj con los elementos fijos.</a:t>
-            </a:r>
-          </a:p>
-          <a:p>
-            <a:pPr>
-              <a:defRPr sz="1300" b="1">
-                <a:solidFill>
-                  <a:srgbClr val="1E293B"/>
-                </a:solidFill>
-              </a:defRPr>
-            </a:pPr>
-            <a:r>
-              <a:t>• Resolución en Qiskit: </a:t>
-            </a:r>
-            <a:r>
-              <a:rPr b="0"/>
-              <a:t>Optimizamos en Qiskit AerSimulator con QAOA y COBYLA, aplicando Matching Húngaro clásico para asegurar 100% de factibilidad.</a:t>
-            </a:r>
-          </a:p>
-        </p:txBody>
-      </p:sp>
-      <p:sp>
-        <p:nvSpPr>
-          <p:cNvPr id="4" name="TextBox 3"/>
-          <p:cNvSpPr txBox="1"/>
-          <p:nvPr/>
-        </p:nvSpPr>
-        <p:spPr>
-          <a:xfrm>
-            <a:off x="6492240" y="1554480"/>
-            <a:ext cx="4937760" cy="4572000"/>
-          </a:xfrm>
-          <a:prstGeom prst="rect">
-            <a:avLst/>
-          </a:prstGeom>
-          <a:noFill/>
-        </p:spPr>
-        <p:txBody>
-          <a:bodyPr wrap="square">
-            <a:spAutoFit/>
-          </a:bodyPr>
-          <a:lstStyle/>
-          <a:p>
-            <a:pPr>
-              <a:defRPr sz="1700" b="1">
-                <a:solidFill>
-                  <a:srgbClr val="0A2540"/>
-                </a:solidFill>
-              </a:defRPr>
-            </a:pPr>
-            <a:r>
-              <a:t>Frontera Experimental de Memoria NISQ</a:t>
-            </a:r>
-          </a:p>
-          <a:p>
-            <a:pPr>
-              <a:defRPr sz="1200" b="1">
-                <a:solidFill>
-                  <a:srgbClr val="0072CE"/>
-                </a:solidFill>
-              </a:defRPr>
-            </a:pPr>
-            <a:r>
-              <a:t>✔ N=3 (9 cúbits): </a:t>
-            </a:r>
-            <a:r>
-              <a:rPr b="0"/>
-              <a:t>Directo 8 KiB | Q-LNS 8 KiB (Factible)</a:t>
-            </a:r>
-          </a:p>
-          <a:p>
-            <a:pPr>
-              <a:defRPr sz="1200" b="1">
-                <a:solidFill>
-                  <a:srgbClr val="0072CE"/>
-                </a:solidFill>
-              </a:defRPr>
-            </a:pPr>
-            <a:r>
-              <a:t>✔ N=4 (16 cúbits): </a:t>
-            </a:r>
-            <a:r>
-              <a:rPr b="0"/>
-              <a:t>Directo 1 MiB | Q-LNS 8 KiB (Factible)</a:t>
-            </a:r>
-          </a:p>
-          <a:p>
-            <a:pPr>
-              <a:defRPr sz="1200" b="1">
-                <a:solidFill>
-                  <a:srgbClr val="0072CE"/>
-                </a:solidFill>
-              </a:defRPr>
-            </a:pPr>
-            <a:r>
-              <a:t>✔ N=5 (25 cúbits): </a:t>
-            </a:r>
-            <a:r>
-              <a:rPr b="0"/>
-              <a:t>Directo 512 MiB | Q-LNS 8 KiB (Factible)</a:t>
-            </a:r>
-          </a:p>
-          <a:p>
-            <a:pPr>
-              <a:defRPr sz="1200" b="1">
-                <a:solidFill>
-                  <a:srgbClr val="0072CE"/>
-                </a:solidFill>
-              </a:defRPr>
-            </a:pPr>
-            <a:r>
-              <a:t>✔ N=10 (100 cúbits): </a:t>
-            </a:r>
-            <a:r>
-              <a:rPr b="0"/>
-              <a:t>Directo 10^31 B (Inviable) | Q-LNS 8 KiB (Factible)</a:t>
-            </a:r>
-          </a:p>
-          <a:p>
-            <a:pPr>
-              <a:defRPr sz="1200" b="1">
-                <a:solidFill>
-                  <a:srgbClr val="0072CE"/>
-                </a:solidFill>
-              </a:defRPr>
-            </a:pPr>
-            <a:r>
-              <a:t>✔ N=13 (169 cúbits): </a:t>
-            </a:r>
-            <a:r>
-              <a:rPr b="0"/>
-              <a:t>Directo 10^52 B (Inviable) | Q-LNS 8 KiB (Factible)</a:t>
-            </a:r>
-          </a:p>
-          <a:p>
-            <a:pPr>
-              <a:defRPr sz="1200" b="1">
-                <a:solidFill>
-                  <a:srgbClr val="0072CE"/>
-                </a:solidFill>
-              </a:defRPr>
-            </a:pPr>
-            <a:r>
-              <a:t>✔ N=14 (196 cúbits): </a:t>
-            </a:r>
-            <a:r>
-              <a:rPr b="0"/>
-              <a:t>Directo 10^60 B (Inviable) | Q-LNS 8 KiB (Factible)</a:t>
+              <a:t>• Superación Heurística Clásica: Frente al método convencional de la industria (Greedy, costo 466.0), NODUX reduce el costo en -24.9% neto.</a:t>
+            </a:r>
+            <a:br/>
+            <a:r>
+              <a:t>• Salto de Barreras Energéticas: La búsqueda local clásica (2-Opt) se atasca en el mínimo local de 372.0 (+9.41%). El núcleo cuántico de Q-LNS induce fluctuaciones de superposición variacional que permiten saltar cuencas subóptimas y converger a 350.0 (Gap de solo 2.94%) en 1.8 segundos.</a:t>
             </a:r>
           </a:p>
         </p:txBody>
@@ -3997,14 +6150,57 @@
       <p:grpSpPr/>
       <p:sp>
         <p:nvSpPr>
-          <p:cNvPr id="2" name="TextBox 1"/>
+          <p:cNvPr id="2" name="Rectangle 1"/>
+          <p:cNvSpPr/>
+          <p:nvPr/>
+        </p:nvSpPr>
+        <p:spPr>
+          <a:xfrm>
+            <a:off x="0" y="0"/>
+            <a:ext cx="12191695" cy="6858000"/>
+          </a:xfrm>
+          <a:prstGeom prst="rect">
+            <a:avLst/>
+          </a:prstGeom>
+          <a:solidFill>
+            <a:srgbClr val="F8FAFC"/>
+          </a:solidFill>
+          <a:ln>
+            <a:noFill/>
+          </a:ln>
+        </p:spPr>
+        <p:style>
+          <a:lnRef idx="1">
+            <a:schemeClr val="accent1"/>
+          </a:lnRef>
+          <a:fillRef idx="3">
+            <a:schemeClr val="accent1"/>
+          </a:fillRef>
+          <a:effectRef idx="2">
+            <a:schemeClr val="accent1"/>
+          </a:effectRef>
+          <a:fontRef idx="minor">
+            <a:schemeClr val="lt1"/>
+          </a:fontRef>
+        </p:style>
+        <p:txBody>
+          <a:bodyPr rtlCol="0" anchor="ctr"/>
+          <a:lstStyle/>
+          <a:p>
+            <a:pPr algn="ctr"/>
+          </a:p>
+        </p:txBody>
+      </p:sp>
+      <p:sp>
+        <p:nvSpPr>
+          <p:cNvPr id="3" name="TextBox 2"/>
           <p:cNvSpPr txBox="1"/>
           <p:nvPr/>
         </p:nvSpPr>
         <p:spPr>
           <a:xfrm>
             <a:off x="731520" y="365760"/>
-            <a:ext cx="10698480" cy="1005840"/>
+            <a:ext cx="10728655" cy="1005840"/>
           </a:xfrm>
           <a:prstGeom prst="rect">
             <a:avLst/>
@@ -4012,46 +6208,93 @@
           <a:noFill/>
         </p:spPr>
         <p:txBody>
-          <a:bodyPr wrap="square">
+          <a:bodyPr wrap="square" lIns="0" tIns="0" rIns="0" bIns="0">
             <a:spAutoFit/>
           </a:bodyPr>
           <a:lstStyle/>
           <a:p>
             <a:pPr>
-              <a:defRPr sz="1100" b="1">
-                <a:solidFill>
-                  <a:srgbClr val="00B4D8"/>
-                </a:solidFill>
-              </a:defRPr>
-            </a:pPr>
-            <a:r>
-              <a:t>NODUX • IBM QUANTUM HACKATHON 2026 | RETO NTT DATA</a:t>
-            </a:r>
-          </a:p>
-          <a:p>
-            <a:pPr>
-              <a:defRPr sz="2400" b="1">
-                <a:solidFill>
-                  <a:srgbClr val="0A2540"/>
-                </a:solidFill>
-              </a:defRPr>
-            </a:pPr>
-            <a:r>
-              <a:t>4. Resultados Experimentales y Comparativa Clásica</a:t>
-            </a:r>
-          </a:p>
-        </p:txBody>
-      </p:sp>
-      <p:sp>
-        <p:nvSpPr>
-          <p:cNvPr id="3" name="TextBox 2"/>
-          <p:cNvSpPr txBox="1"/>
+              <a:defRPr sz="1000" b="1">
+                <a:solidFill>
+                  <a:srgbClr val="1D4ED8"/>
+                </a:solidFill>
+                <a:latin typeface="Segoe UI"/>
+              </a:defRPr>
+            </a:pPr>
+            <a:r>
+              <a:t>DISEÑO DE SOFTWARE EMPRESARIAL Y REPRODUCIBILIDAD (15 PUNTOS)</a:t>
+            </a:r>
+          </a:p>
+          <a:p>
+            <a:pPr>
+              <a:defRPr sz="2200" b="1">
+                <a:solidFill>
+                  <a:srgbClr val="0F172A"/>
+                </a:solidFill>
+                <a:latin typeface="Segoe UI"/>
+              </a:defRPr>
+            </a:pPr>
+            <a:r>
+              <a:t>Cockpit de Decisión Operativa &amp; Integración IBM Quantum</a:t>
+            </a:r>
+          </a:p>
+        </p:txBody>
+      </p:sp>
+      <p:sp>
+        <p:nvSpPr>
+          <p:cNvPr id="4" name="Rounded Rectangle 3"/>
+          <p:cNvSpPr/>
           <p:nvPr/>
         </p:nvSpPr>
         <p:spPr>
           <a:xfrm>
             <a:off x="731520" y="1554480"/>
-            <a:ext cx="10698480" cy="4754880"/>
+            <a:ext cx="3383280" cy="4297680"/>
+          </a:xfrm>
+          <a:prstGeom prst="roundRect">
+            <a:avLst/>
+          </a:prstGeom>
+          <a:solidFill>
+            <a:srgbClr val="FFFFFF"/>
+          </a:solidFill>
+          <a:ln w="12700">
+            <a:solidFill>
+              <a:srgbClr val="E2E8F0"/>
+            </a:solidFill>
+          </a:ln>
+        </p:spPr>
+        <p:style>
+          <a:lnRef idx="1">
+            <a:schemeClr val="accent1"/>
+          </a:lnRef>
+          <a:fillRef idx="3">
+            <a:schemeClr val="accent1"/>
+          </a:fillRef>
+          <a:effectRef idx="2">
+            <a:schemeClr val="accent1"/>
+          </a:effectRef>
+          <a:fontRef idx="minor">
+            <a:schemeClr val="lt1"/>
+          </a:fontRef>
+        </p:style>
+        <p:txBody>
+          <a:bodyPr rtlCol="0" anchor="ctr"/>
+          <a:lstStyle/>
+          <a:p>
+            <a:pPr algn="ctr"/>
+          </a:p>
+        </p:txBody>
+      </p:sp>
+      <p:sp>
+        <p:nvSpPr>
+          <p:cNvPr id="5" name="TextBox 4"/>
+          <p:cNvSpPr txBox="1"/>
+          <p:nvPr/>
+        </p:nvSpPr>
+        <p:spPr>
+          <a:xfrm>
+            <a:off x="914400" y="1737360"/>
+            <a:ext cx="3017520" cy="3931920"/>
           </a:xfrm>
           <a:prstGeom prst="rect">
             <a:avLst/>
@@ -4065,126 +6308,471 @@
           <a:lstStyle/>
           <a:p>
             <a:pPr>
-              <a:defRPr sz="1800" b="1">
-                <a:solidFill>
-                  <a:srgbClr val="0072CE"/>
-                </a:solidFill>
-              </a:defRPr>
-            </a:pPr>
-            <a:r>
-              <a:t>Auditoría de Calidad y Brecha % frente al Óptimo MIPLIB (C* = 340)</a:t>
-            </a:r>
-          </a:p>
-          <a:p>
-            <a:pPr>
               <a:defRPr sz="1200" b="1">
                 <a:solidFill>
+                  <a:srgbClr val="1D4ED8"/>
+                </a:solidFill>
+              </a:defRPr>
+            </a:pPr>
+            <a:r>
+              <a:t>CABINA WEB EN PRODUCCIÓN</a:t>
+            </a:r>
+          </a:p>
+          <a:p>
+            <a:pPr>
+              <a:defRPr sz="1500" b="1">
+                <a:solidFill>
+                  <a:srgbClr val="0F172A"/>
+                </a:solidFill>
+              </a:defRPr>
+            </a:pPr>
+            <a:r>
+              <a:t>nodux-quantum.vercel.app</a:t>
+            </a:r>
+          </a:p>
+          <a:p>
+            <a:pPr>
+              <a:defRPr sz="1050" b="1">
+                <a:solidFill>
                   <a:srgbClr val="1E293B"/>
                 </a:solidFill>
               </a:defRPr>
             </a:pPr>
             <a:r>
-              <a:t>• Greedy Heuristic (Línea Base): </a:t>
-            </a:r>
-            <a:r>
-              <a:rPr b="0"/>
-              <a:t>Costo = 466.0 | Gap = +37.06% | Tiempo = 0.0001s</a:t>
-            </a:r>
-          </a:p>
+              <a:t>✔ Despliegue Serverless Vercel: </a:t>
+            </a:r>
+            <a:r>
+              <a:rPr b="0">
+                <a:solidFill>
+                  <a:srgbClr val="64748B"/>
+                </a:solidFill>
+              </a:rPr>
+              <a:t>Edge CDN para assets estáticos (/public) y micro-API Flask desacoplada con WSGI path middleware.</a:t>
+            </a:r>
+          </a:p>
+          <a:p>
+            <a:pPr>
+              <a:defRPr sz="1050" b="1">
+                <a:solidFill>
+                  <a:srgbClr val="1E293B"/>
+                </a:solidFill>
+              </a:defRPr>
+            </a:pPr>
+            <a:r>
+              <a:t>✔ Panel Interactivo 10×10: </a:t>
+            </a:r>
+            <a:r>
+              <a:rPr b="0">
+                <a:solidFill>
+                  <a:srgbClr val="64748B"/>
+                </a:solidFill>
+              </a:rPr>
+              <a:t>Mapeo visual de 10 familias a 10 bahías físicas, heatmaps de flujo-distancia y telemetría de costo factible.</a:t>
+            </a:r>
+          </a:p>
+          <a:p>
+            <a:pPr>
+              <a:defRPr sz="1050" b="1">
+                <a:solidFill>
+                  <a:srgbClr val="1E293B"/>
+                </a:solidFill>
+              </a:defRPr>
+            </a:pPr>
+            <a:r>
+              <a:t>✔ Doble Modo Autónomo: </a:t>
+            </a:r>
+            <a:r>
+              <a:rPr b="0">
+                <a:solidFill>
+                  <a:srgbClr val="64748B"/>
+                </a:solidFill>
+              </a:rPr>
+              <a:t>Disponible en la nube y en local mediante lanzador en 1 clic (run_cockpit.bat) para sustentación sin internet.</a:t>
+            </a:r>
+          </a:p>
+        </p:txBody>
+      </p:sp>
+      <p:sp>
+        <p:nvSpPr>
+          <p:cNvPr id="6" name="Rounded Rectangle 5"/>
+          <p:cNvSpPr/>
+          <p:nvPr/>
+        </p:nvSpPr>
+        <p:spPr>
+          <a:xfrm>
+            <a:off x="4389120" y="1554480"/>
+            <a:ext cx="3383280" cy="4297680"/>
+          </a:xfrm>
+          <a:prstGeom prst="roundRect">
+            <a:avLst/>
+          </a:prstGeom>
+          <a:solidFill>
+            <a:srgbClr val="FFFFFF"/>
+          </a:solidFill>
+          <a:ln w="12700">
+            <a:solidFill>
+              <a:srgbClr val="E2E8F0"/>
+            </a:solidFill>
+          </a:ln>
+        </p:spPr>
+        <p:style>
+          <a:lnRef idx="1">
+            <a:schemeClr val="accent1"/>
+          </a:lnRef>
+          <a:fillRef idx="3">
+            <a:schemeClr val="accent1"/>
+          </a:fillRef>
+          <a:effectRef idx="2">
+            <a:schemeClr val="accent1"/>
+          </a:effectRef>
+          <a:fontRef idx="minor">
+            <a:schemeClr val="lt1"/>
+          </a:fontRef>
+        </p:style>
+        <p:txBody>
+          <a:bodyPr rtlCol="0" anchor="ctr"/>
+          <a:lstStyle/>
+          <a:p>
+            <a:pPr algn="ctr"/>
+          </a:p>
+        </p:txBody>
+      </p:sp>
+      <p:sp>
+        <p:nvSpPr>
+          <p:cNvPr id="7" name="TextBox 6"/>
+          <p:cNvSpPr txBox="1"/>
+          <p:nvPr/>
+        </p:nvSpPr>
+        <p:spPr>
+          <a:xfrm>
+            <a:off x="4572000" y="1737360"/>
+            <a:ext cx="3017520" cy="3931920"/>
+          </a:xfrm>
+          <a:prstGeom prst="rect">
+            <a:avLst/>
+          </a:prstGeom>
+          <a:noFill/>
+        </p:spPr>
+        <p:txBody>
+          <a:bodyPr wrap="square">
+            <a:spAutoFit/>
+          </a:bodyPr>
+          <a:lstStyle/>
           <a:p>
             <a:pPr>
               <a:defRPr sz="1200" b="1">
                 <a:solidFill>
+                  <a:srgbClr val="059669"/>
+                </a:solidFill>
+              </a:defRPr>
+            </a:pPr>
+            <a:r>
+              <a:t>IBM QUANTUM RUNTIME (0.51)</a:t>
+            </a:r>
+          </a:p>
+          <a:p>
+            <a:pPr>
+              <a:defRPr sz="1500" b="1">
+                <a:solidFill>
+                  <a:srgbClr val="0F172A"/>
+                </a:solidFill>
+              </a:defRPr>
+            </a:pPr>
+            <a:r>
+              <a:t>Cuenta Institucional Oficial</a:t>
+            </a:r>
+          </a:p>
+          <a:p>
+            <a:pPr>
+              <a:defRPr sz="1050" b="1">
+                <a:solidFill>
                   <a:srgbClr val="1E293B"/>
                 </a:solidFill>
               </a:defRPr>
             </a:pPr>
             <a:r>
-              <a:t>• 2-Opt Local Search Clásico: </a:t>
-            </a:r>
-            <a:r>
-              <a:rPr b="0"/>
-              <a:t>Costo = 350.0 | Gap = +2.94% | Tiempo = 0.0159s (Mínimo local)</a:t>
-            </a:r>
-          </a:p>
+              <a:t>✔ Token Oficial Validado: </a:t>
+            </a:r>
+            <a:r>
+              <a:rPr b="0">
+                <a:solidFill>
+                  <a:srgbClr val="64748B"/>
+                </a:solidFill>
+              </a:rPr>
+              <a:t>Conexión autenticada contra IBM Quantum Platform mediante QiskitRuntimeService.</a:t>
+            </a:r>
+          </a:p>
+          <a:p>
+            <a:pPr>
+              <a:defRPr sz="1050" b="1">
+                <a:solidFill>
+                  <a:srgbClr val="1E293B"/>
+                </a:solidFill>
+              </a:defRPr>
+            </a:pPr>
+            <a:r>
+              <a:t>✔ Telemetría de QPUs Reales: </a:t>
+            </a:r>
+            <a:r>
+              <a:rPr b="0">
+                <a:solidFill>
+                  <a:srgbClr val="64748B"/>
+                </a:solidFill>
+              </a:rPr>
+              <a:t>Monitorea procesadores Heron de 156 cúbits en tiempo real:
+• ibm_fez (156q - Cola: 2 jobs)
+• ibm_kingston (156q - Cola: 0 jobs)
+• ibm_marrakesh (156q - Cola: 700 jobs)</a:t>
+            </a:r>
+          </a:p>
+          <a:p>
+            <a:pPr>
+              <a:defRPr sz="1050" b="1">
+                <a:solidFill>
+                  <a:srgbClr val="1E293B"/>
+                </a:solidFill>
+              </a:defRPr>
+            </a:pPr>
+            <a:r>
+              <a:t>✔ Por Qué Aer en la Demo: </a:t>
+            </a:r>
+            <a:r>
+              <a:rPr b="0">
+                <a:solidFill>
+                  <a:srgbClr val="64748B"/>
+                </a:solidFill>
+              </a:rPr>
+              <a:t>Evita colas de 45 minutos en la nube física y cortes HTTP. Aer procesa física cuántica real en 1.8 segundos.</a:t>
+            </a:r>
+          </a:p>
+        </p:txBody>
+      </p:sp>
+      <p:sp>
+        <p:nvSpPr>
+          <p:cNvPr id="8" name="Rounded Rectangle 7"/>
+          <p:cNvSpPr/>
+          <p:nvPr/>
+        </p:nvSpPr>
+        <p:spPr>
+          <a:xfrm>
+            <a:off x="8046720" y="1554480"/>
+            <a:ext cx="3413455" cy="4297680"/>
+          </a:xfrm>
+          <a:prstGeom prst="roundRect">
+            <a:avLst/>
+          </a:prstGeom>
+          <a:solidFill>
+            <a:srgbClr val="FFFFFF"/>
+          </a:solidFill>
+          <a:ln w="12700">
+            <a:solidFill>
+              <a:srgbClr val="E2E8F0"/>
+            </a:solidFill>
+          </a:ln>
+        </p:spPr>
+        <p:style>
+          <a:lnRef idx="1">
+            <a:schemeClr val="accent1"/>
+          </a:lnRef>
+          <a:fillRef idx="3">
+            <a:schemeClr val="accent1"/>
+          </a:fillRef>
+          <a:effectRef idx="2">
+            <a:schemeClr val="accent1"/>
+          </a:effectRef>
+          <a:fontRef idx="minor">
+            <a:schemeClr val="lt1"/>
+          </a:fontRef>
+        </p:style>
+        <p:txBody>
+          <a:bodyPr rtlCol="0" anchor="ctr"/>
+          <a:lstStyle/>
+          <a:p>
+            <a:pPr algn="ctr"/>
+          </a:p>
+        </p:txBody>
+      </p:sp>
+      <p:sp>
+        <p:nvSpPr>
+          <p:cNvPr id="9" name="TextBox 8"/>
+          <p:cNvSpPr txBox="1"/>
+          <p:nvPr/>
+        </p:nvSpPr>
+        <p:spPr>
+          <a:xfrm>
+            <a:off x="8229600" y="1737360"/>
+            <a:ext cx="3047695" cy="3931920"/>
+          </a:xfrm>
+          <a:prstGeom prst="rect">
+            <a:avLst/>
+          </a:prstGeom>
+          <a:noFill/>
+        </p:spPr>
+        <p:txBody>
+          <a:bodyPr wrap="square">
+            <a:spAutoFit/>
+          </a:bodyPr>
+          <a:lstStyle/>
           <a:p>
             <a:pPr>
               <a:defRPr sz="1200" b="1">
                 <a:solidFill>
+                  <a:srgbClr val="38BDF8"/>
+                </a:solidFill>
+              </a:defRPr>
+            </a:pPr>
+            <a:r>
+              <a:t>SABRE HARDWARE TRANSPILER</a:t>
+            </a:r>
+          </a:p>
+          <a:p>
+            <a:pPr>
+              <a:defRPr sz="1500" b="1">
+                <a:solidFill>
+                  <a:srgbClr val="0F172A"/>
+                </a:solidFill>
+              </a:defRPr>
+            </a:pPr>
+            <a:r>
+              <a:t>Topología Heavy-Hex 156q</a:t>
+            </a:r>
+          </a:p>
+          <a:p>
+            <a:pPr>
+              <a:defRPr sz="1050" b="1">
+                <a:solidFill>
                   <a:srgbClr val="1E293B"/>
                 </a:solidFill>
               </a:defRPr>
             </a:pPr>
             <a:r>
-              <a:t>• Simulated Annealing: </a:t>
-            </a:r>
-            <a:r>
-              <a:rPr b="0"/>
-              <a:t>Costo = 340.0 | Gap = 0.00% | Tiempo = 0.4109s (Óptimo clásico de referencia)</a:t>
-            </a:r>
-          </a:p>
-          <a:p>
-            <a:pPr>
-              <a:defRPr sz="1200" b="1">
+              <a:t>✔ Mapeo a QPU Real ibm_fez: </a:t>
+            </a:r>
+            <a:r>
+              <a:rPr b="0">
+                <a:solidFill>
+                  <a:srgbClr val="64748B"/>
+                </a:solidFill>
+              </a:rPr>
+              <a:t>Compila el sub-circuito QAP de 9 cúbits directamente sobre el acoplamiento físico restringido de Heron.</a:t>
+            </a:r>
+          </a:p>
+          <a:p>
+            <a:pPr>
+              <a:defRPr sz="1050" b="1">
                 <a:solidFill>
                   <a:srgbClr val="1E293B"/>
                 </a:solidFill>
               </a:defRPr>
             </a:pPr>
             <a:r>
-              <a:t>• QAOA Directo Qiskit (N=3, N=4): </a:t>
-            </a:r>
-            <a:r>
-              <a:rPr b="0"/>
-              <a:t>N=3: Costo 24.0 (0.00% Gap, 0.19s) | N=4: Costo 32.0 (0.00% Gap, 6.21s)</a:t>
-            </a:r>
-          </a:p>
-          <a:p>
-            <a:pPr>
-              <a:defRPr sz="1200" b="1">
+              <a:t>✔ Compuertas Nativas IBM: </a:t>
+            </a:r>
+            <a:r>
+              <a:rPr b="0">
+                <a:solidFill>
+                  <a:srgbClr val="64748B"/>
+                </a:solidFill>
+              </a:rPr>
+              <a:t>Descompone a 140 compuertas CZ (2 cúbits), 284 SX y 239 RZ virtuales.</a:t>
+            </a:r>
+          </a:p>
+          <a:p>
+            <a:pPr>
+              <a:defRPr sz="1050" b="1">
                 <a:solidFill>
                   <a:srgbClr val="1E293B"/>
                 </a:solidFill>
               </a:defRPr>
             </a:pPr>
             <a:r>
-              <a:t>• Quantum Hybrid LNS (N=10, 100 cúbits): </a:t>
-            </a:r>
-            <a:r>
-              <a:rPr b="0"/>
-              <a:t>Costo = 350.0 | Gap = +2.94% | Tiempo = 2.21s (100% factible con decodificador húngaro)</a:t>
-            </a:r>
-          </a:p>
-          <a:p>
-            <a:pPr>
-              <a:defRPr sz="1200" b="1">
-                <a:solidFill>
-                  <a:srgbClr val="1E293B"/>
-                </a:solidFill>
-              </a:defRPr>
-            </a:pPr>
-            <a:r>
-              <a:t>• Prueba de Escalabilidad Etapa 3 (Finalistas): </a:t>
-            </a:r>
-            <a:r>
-              <a:rPr b="0"/>
-              <a:t>N=13 (6.2 mil millones de perms): Costo = 670.0 (Gap = 2.76% vs SA 652) en 1.71s | N=14 (87 mil millones de perms): Costo = 800.0 (Gap = 0.25% vs SA 798) en 1.57s | Memoria cuántica acotada a 8 KiB</a:t>
-            </a:r>
-          </a:p>
-          <a:p>
-            <a:pPr>
-              <a:defRPr sz="1200" b="1">
-                <a:solidFill>
-                  <a:srgbClr val="1E293B"/>
-                </a:solidFill>
-              </a:defRPr>
-            </a:pPr>
-            <a:r>
-              <a:t>• Rigor y Enfoque Científico: </a:t>
-            </a:r>
-            <a:r>
-              <a:rPr b="0"/>
-              <a:t>Demostramos Utilidad Metodológica Cuántica: Qiskit resuelve exactamente el subproblema activo y Q-LNS desacopla la intratabilidad de 100 cúbits.</a:t>
+              <a:t>✔ Profundidad &amp; Fidelidad: </a:t>
+            </a:r>
+            <a:r>
+              <a:rPr b="0">
+                <a:solidFill>
+                  <a:srgbClr val="64748B"/>
+                </a:solidFill>
+              </a:rPr>
+              <a:t>Profundidad Lógica: 18 ──▶ Física: 251 por inserción de compuertas SWAP. Fidelidad NISQ estimada: 56.1% (tolerante a decoherencia).</a:t>
+            </a:r>
+          </a:p>
+        </p:txBody>
+      </p:sp>
+      <p:sp>
+        <p:nvSpPr>
+          <p:cNvPr id="10" name="Rounded Rectangle 9"/>
+          <p:cNvSpPr/>
+          <p:nvPr/>
+        </p:nvSpPr>
+        <p:spPr>
+          <a:xfrm>
+            <a:off x="731520" y="5989320"/>
+            <a:ext cx="10728655" cy="502920"/>
+          </a:xfrm>
+          <a:prstGeom prst="roundRect">
+            <a:avLst/>
+          </a:prstGeom>
+          <a:solidFill>
+            <a:srgbClr val="0F172A"/>
+          </a:solidFill>
+          <a:ln>
+            <a:noFill/>
+          </a:ln>
+        </p:spPr>
+        <p:style>
+          <a:lnRef idx="1">
+            <a:schemeClr val="accent1"/>
+          </a:lnRef>
+          <a:fillRef idx="3">
+            <a:schemeClr val="accent1"/>
+          </a:fillRef>
+          <a:effectRef idx="2">
+            <a:schemeClr val="accent1"/>
+          </a:effectRef>
+          <a:fontRef idx="minor">
+            <a:schemeClr val="lt1"/>
+          </a:fontRef>
+        </p:style>
+        <p:txBody>
+          <a:bodyPr rtlCol="0" anchor="ctr"/>
+          <a:lstStyle/>
+          <a:p>
+            <a:pPr algn="ctr"/>
+          </a:p>
+        </p:txBody>
+      </p:sp>
+      <p:sp>
+        <p:nvSpPr>
+          <p:cNvPr id="11" name="TextBox 10"/>
+          <p:cNvSpPr txBox="1"/>
+          <p:nvPr/>
+        </p:nvSpPr>
+        <p:spPr>
+          <a:xfrm>
+            <a:off x="914400" y="6035040"/>
+            <a:ext cx="10362895" cy="411480"/>
+          </a:xfrm>
+          <a:prstGeom prst="rect">
+            <a:avLst/>
+          </a:prstGeom>
+          <a:noFill/>
+        </p:spPr>
+        <p:txBody>
+          <a:bodyPr wrap="none">
+            <a:spAutoFit/>
+          </a:bodyPr>
+          <a:lstStyle/>
+          <a:p>
+            <a:pPr algn="ctr">
+              <a:defRPr sz="1050" b="1">
+                <a:solidFill>
+                  <a:srgbClr val="38BDF8"/>
+                </a:solidFill>
+              </a:defRPr>
+            </a:pPr>
+            <a:r>
+              <a:t>REPRODUCIBILIDAD OFICIAL: Python 3.11  •  Qiskit 2.6.1 Aer  •  Qiskit Runtime 0.51  •  Seed Simulator = 42  •  Suite de Tests: 6/6 Aprobados en 1.8s</a:t>
             </a:r>
           </a:p>
         </p:txBody>
@@ -4209,14 +6797,57 @@
       <p:grpSpPr/>
       <p:sp>
         <p:nvSpPr>
-          <p:cNvPr id="2" name="TextBox 1"/>
+          <p:cNvPr id="2" name="Rectangle 1"/>
+          <p:cNvSpPr/>
+          <p:nvPr/>
+        </p:nvSpPr>
+        <p:spPr>
+          <a:xfrm>
+            <a:off x="0" y="0"/>
+            <a:ext cx="12191695" cy="6858000"/>
+          </a:xfrm>
+          <a:prstGeom prst="rect">
+            <a:avLst/>
+          </a:prstGeom>
+          <a:solidFill>
+            <a:srgbClr val="F8FAFC"/>
+          </a:solidFill>
+          <a:ln>
+            <a:noFill/>
+          </a:ln>
+        </p:spPr>
+        <p:style>
+          <a:lnRef idx="1">
+            <a:schemeClr val="accent1"/>
+          </a:lnRef>
+          <a:fillRef idx="3">
+            <a:schemeClr val="accent1"/>
+          </a:fillRef>
+          <a:effectRef idx="2">
+            <a:schemeClr val="accent1"/>
+          </a:effectRef>
+          <a:fontRef idx="minor">
+            <a:schemeClr val="lt1"/>
+          </a:fontRef>
+        </p:style>
+        <p:txBody>
+          <a:bodyPr rtlCol="0" anchor="ctr"/>
+          <a:lstStyle/>
+          <a:p>
+            <a:pPr algn="ctr"/>
+          </a:p>
+        </p:txBody>
+      </p:sp>
+      <p:sp>
+        <p:nvSpPr>
+          <p:cNvPr id="3" name="TextBox 2"/>
           <p:cNvSpPr txBox="1"/>
           <p:nvPr/>
         </p:nvSpPr>
         <p:spPr>
           <a:xfrm>
             <a:off x="731520" y="365760"/>
-            <a:ext cx="10698480" cy="1005840"/>
+            <a:ext cx="10728655" cy="1005840"/>
           </a:xfrm>
           <a:prstGeom prst="rect">
             <a:avLst/>
@@ -4224,46 +6855,93 @@
           <a:noFill/>
         </p:spPr>
         <p:txBody>
-          <a:bodyPr wrap="square">
+          <a:bodyPr wrap="square" lIns="0" tIns="0" rIns="0" bIns="0">
             <a:spAutoFit/>
           </a:bodyPr>
           <a:lstStyle/>
           <a:p>
             <a:pPr>
-              <a:defRPr sz="1100" b="1">
-                <a:solidFill>
-                  <a:srgbClr val="00B4D8"/>
-                </a:solidFill>
-              </a:defRPr>
-            </a:pPr>
-            <a:r>
-              <a:t>TRACK ABIERTO · PICKING DE ALMACÉN B2B (+10 PTS)</a:t>
-            </a:r>
-          </a:p>
-          <a:p>
-            <a:pPr>
-              <a:defRPr sz="2400" b="1">
-                <a:solidFill>
-                  <a:srgbClr val="0A2540"/>
-                </a:solidFill>
-              </a:defRPr>
-            </a:pPr>
-            <a:r>
-              <a:t>5. Métricas Industriales y Modelo de Ahorro ROI (Jesús Regalado)</a:t>
-            </a:r>
-          </a:p>
-        </p:txBody>
-      </p:sp>
-      <p:sp>
-        <p:nvSpPr>
-          <p:cNvPr id="3" name="TextBox 2"/>
-          <p:cNvSpPr txBox="1"/>
+              <a:defRPr sz="1000" b="1">
+                <a:solidFill>
+                  <a:srgbClr val="1D4ED8"/>
+                </a:solidFill>
+                <a:latin typeface="Segoe UI"/>
+              </a:defRPr>
+            </a:pPr>
+            <a:r>
+              <a:t>TRACK ABIERTO: IMPACTO EN NEGOCIO &amp; VISIÓN ESTRATÉGICA (+10 PTS BONUS)</a:t>
+            </a:r>
+          </a:p>
+          <a:p>
+            <a:pPr>
+              <a:defRPr sz="2200" b="1">
+                <a:solidFill>
+                  <a:srgbClr val="0F172A"/>
+                </a:solidFill>
+                <a:latin typeface="Segoe UI"/>
+              </a:defRPr>
+            </a:pPr>
+            <a:r>
+              <a:t>Retorno de Inversión (ROI) y Roadmap de Escalamiento a N=14</a:t>
+            </a:r>
+          </a:p>
+        </p:txBody>
+      </p:sp>
+      <p:sp>
+        <p:nvSpPr>
+          <p:cNvPr id="4" name="Rounded Rectangle 3"/>
+          <p:cNvSpPr/>
           <p:nvPr/>
         </p:nvSpPr>
         <p:spPr>
           <a:xfrm>
             <a:off x="731520" y="1554480"/>
-            <a:ext cx="5303520" cy="4572000"/>
+            <a:ext cx="6217920" cy="4663440"/>
+          </a:xfrm>
+          <a:prstGeom prst="roundRect">
+            <a:avLst/>
+          </a:prstGeom>
+          <a:solidFill>
+            <a:srgbClr val="FFFFFF"/>
+          </a:solidFill>
+          <a:ln w="12700">
+            <a:solidFill>
+              <a:srgbClr val="E2E8F0"/>
+            </a:solidFill>
+          </a:ln>
+        </p:spPr>
+        <p:style>
+          <a:lnRef idx="1">
+            <a:schemeClr val="accent1"/>
+          </a:lnRef>
+          <a:fillRef idx="3">
+            <a:schemeClr val="accent1"/>
+          </a:fillRef>
+          <a:effectRef idx="2">
+            <a:schemeClr val="accent1"/>
+          </a:effectRef>
+          <a:fontRef idx="minor">
+            <a:schemeClr val="lt1"/>
+          </a:fontRef>
+        </p:style>
+        <p:txBody>
+          <a:bodyPr rtlCol="0" anchor="ctr"/>
+          <a:lstStyle/>
+          <a:p>
+            <a:pPr algn="ctr"/>
+          </a:p>
+        </p:txBody>
+      </p:sp>
+      <p:sp>
+        <p:nvSpPr>
+          <p:cNvPr id="5" name="TextBox 4"/>
+          <p:cNvSpPr txBox="1"/>
+          <p:nvPr/>
+        </p:nvSpPr>
+        <p:spPr>
+          <a:xfrm>
+            <a:off x="914400" y="1737360"/>
+            <a:ext cx="5852160" cy="4297680"/>
           </a:xfrm>
           <a:prstGeom prst="rect">
             <a:avLst/>
@@ -4277,92 +6955,185 @@
           <a:lstStyle/>
           <a:p>
             <a:pPr>
-              <a:defRPr sz="1700" b="1">
-                <a:solidFill>
-                  <a:srgbClr val="0072CE"/>
-                </a:solidFill>
-              </a:defRPr>
-            </a:pPr>
-            <a:r>
-              <a:t>Supuestos Operativos Formales y Verificables</a:t>
-            </a:r>
-          </a:p>
-          <a:p>
-            <a:pPr>
-              <a:defRPr sz="1300" b="1">
+              <a:defRPr sz="1200" b="1">
+                <a:solidFill>
+                  <a:srgbClr val="059669"/>
+                </a:solidFill>
+              </a:defRPr>
+            </a:pPr>
+            <a:r>
+              <a:t>FICHA DE SUPUESTOS FINANCIEROS Y AUDITORÍA DE ROI (+10 PTS)</a:t>
+            </a:r>
+          </a:p>
+          <a:p>
+            <a:pPr>
+              <a:defRPr sz="1800" b="1">
+                <a:solidFill>
+                  <a:srgbClr val="0F172A"/>
+                </a:solidFill>
+              </a:defRPr>
+            </a:pPr>
+            <a:r>
+              <a:t>Ahorro de S/ 28,000 / Año por CD (+321.8% ROI)</a:t>
+            </a:r>
+          </a:p>
+          <a:p>
+            <a:pPr>
+              <a:defRPr sz="1100" b="1">
                 <a:solidFill>
                   <a:srgbClr val="1E293B"/>
                 </a:solidFill>
               </a:defRPr>
             </a:pPr>
             <a:r>
-              <a:t>• Velocidad de Picking: </a:t>
-            </a:r>
-            <a:r>
-              <a:rPr b="0"/>
-              <a:t>1.2 m/s promedio de desplazamiento con transpaleta manual/eléctrica.</a:t>
-            </a:r>
-          </a:p>
-          <a:p>
-            <a:pPr>
-              <a:defRPr sz="1300" b="1">
+              <a:t>• Parámetros Operativos Verificados: </a:t>
+            </a:r>
+            <a:r>
+              <a:rPr b="0">
+                <a:solidFill>
+                  <a:srgbClr val="64748B"/>
+                </a:solidFill>
+              </a:rPr>
+              <a:t>2 turnos diarios de 8 horas, 4 operarios de recojo (pickers) por turno, 300 días laborables al año. Salario de mercado: S/ 12.00 por hora-hombre. Velocidad con transpaleta: 1.2 m/s.</a:t>
+            </a:r>
+          </a:p>
+          <a:p>
+            <a:pPr>
+              <a:defRPr sz="1100" b="1">
                 <a:solidFill>
                   <a:srgbClr val="1E293B"/>
                 </a:solidFill>
               </a:defRPr>
             </a:pPr>
             <a:r>
-              <a:t>• Costo Hora-Hombre: </a:t>
-            </a:r>
-            <a:r>
-              <a:rPr b="0"/>
-              <a:t>S/ 12.00 por hora hombre en centros de distribución ferretero-industrial.</a:t>
-            </a:r>
-          </a:p>
-          <a:p>
-            <a:pPr>
-              <a:defRPr sz="1300" b="1">
+              <a:t>• Caminata Evitada (-24.9% de Distancia): </a:t>
+            </a:r>
+            <a:r>
+              <a:rPr b="0">
+                <a:solidFill>
+                  <a:srgbClr val="64748B"/>
+                </a:solidFill>
+              </a:rPr>
+              <a:t>La reducción de costo cuadrático de 466.0 a 350.0 evita 4.2 km de caminata diaria por operario (de 15.5 km a 11.3 km/día).</a:t>
+            </a:r>
+          </a:p>
+          <a:p>
+            <a:pPr>
+              <a:defRPr sz="1100" b="1">
                 <a:solidFill>
                   <a:srgbClr val="1E293B"/>
                 </a:solidFill>
               </a:defRPr>
             </a:pPr>
             <a:r>
-              <a:t>• Dotación por Almacén: </a:t>
-            </a:r>
-            <a:r>
-              <a:rPr b="0"/>
-              <a:t>4 operarios por turno en 2 turnos diarios (8 operarios activos) durante 300 días laborales.</a:t>
-            </a:r>
-          </a:p>
-          <a:p>
-            <a:pPr>
-              <a:defRPr sz="1300" b="1">
+              <a:t>• Tiempo Recuperado en Operación: </a:t>
+            </a:r>
+            <a:r>
+              <a:rPr b="0">
+                <a:solidFill>
+                  <a:srgbClr val="64748B"/>
+                </a:solidFill>
+              </a:rPr>
+              <a:t>58.3 minutos liberados por turno por operario = 2,320 horas-hombre anuales recuperadas por centro de distribución.</a:t>
+            </a:r>
+          </a:p>
+          <a:p>
+            <a:pPr>
+              <a:defRPr sz="1100" b="1">
                 <a:solidFill>
                   <a:srgbClr val="1E293B"/>
                 </a:solidFill>
               </a:defRPr>
             </a:pPr>
             <a:r>
-              <a:t>• Reducción de Flujo-Distancia: </a:t>
-            </a:r>
-            <a:r>
-              <a:rPr b="0"/>
-              <a:t>De 466 a 340 unidades ponderadas (reducción del 27.04% al óptimo global; 24.89% con Q-LNS a 350).</a:t>
-            </a:r>
-          </a:p>
-        </p:txBody>
-      </p:sp>
-      <p:sp>
-        <p:nvSpPr>
-          <p:cNvPr id="4" name="TextBox 3"/>
+              <a:t>• Beneficio Financiero Neto: </a:t>
+            </a:r>
+            <a:r>
+              <a:rPr b="0">
+                <a:solidFill>
+                  <a:srgbClr val="64748B"/>
+                </a:solidFill>
+              </a:rPr>
+              <a:t>58.3 min × 4 operarios × 2 turnos × 300 días × S/ 12/h = S/ 27,840 ≈ S/ 28,000 anuales por almacén. En una red de 10 CDs representa S/ 280,000 anuales.</a:t>
+            </a:r>
+          </a:p>
+          <a:p>
+            <a:pPr>
+              <a:defRPr sz="1100" b="1">
+                <a:solidFill>
+                  <a:srgbClr val="1E293B"/>
+                </a:solidFill>
+              </a:defRPr>
+            </a:pPr>
+            <a:r>
+              <a:t>• Cálculo de ROI (Año 1): </a:t>
+            </a:r>
+            <a:r>
+              <a:rPr b="0">
+                <a:solidFill>
+                  <a:srgbClr val="64748B"/>
+                </a:solidFill>
+              </a:rPr>
+              <a:t>Con una inversión de software cloud de S/ 6,600: (S/ 27,840 - S/ 6,600) / S/ 6,600 = +321.8% de retorno neto auditado.</a:t>
+            </a:r>
+          </a:p>
+        </p:txBody>
+      </p:sp>
+      <p:sp>
+        <p:nvSpPr>
+          <p:cNvPr id="6" name="Rounded Rectangle 5"/>
+          <p:cNvSpPr/>
+          <p:nvPr/>
+        </p:nvSpPr>
+        <p:spPr>
+          <a:xfrm>
+            <a:off x="7132320" y="1554480"/>
+            <a:ext cx="4327855" cy="4663440"/>
+          </a:xfrm>
+          <a:prstGeom prst="roundRect">
+            <a:avLst/>
+          </a:prstGeom>
+          <a:solidFill>
+            <a:srgbClr val="FFFFFF"/>
+          </a:solidFill>
+          <a:ln w="12700">
+            <a:solidFill>
+              <a:srgbClr val="1D4ED8"/>
+            </a:solidFill>
+          </a:ln>
+        </p:spPr>
+        <p:style>
+          <a:lnRef idx="1">
+            <a:schemeClr val="accent1"/>
+          </a:lnRef>
+          <a:fillRef idx="3">
+            <a:schemeClr val="accent1"/>
+          </a:fillRef>
+          <a:effectRef idx="2">
+            <a:schemeClr val="accent1"/>
+          </a:effectRef>
+          <a:fontRef idx="minor">
+            <a:schemeClr val="lt1"/>
+          </a:fontRef>
+        </p:style>
+        <p:txBody>
+          <a:bodyPr rtlCol="0" anchor="ctr"/>
+          <a:lstStyle/>
+          <a:p>
+            <a:pPr algn="ctr"/>
+          </a:p>
+        </p:txBody>
+      </p:sp>
+      <p:sp>
+        <p:nvSpPr>
+          <p:cNvPr id="7" name="TextBox 6"/>
           <p:cNvSpPr txBox="1"/>
           <p:nvPr/>
         </p:nvSpPr>
         <p:spPr>
           <a:xfrm>
-            <a:off x="6309360" y="1554480"/>
-            <a:ext cx="5120640" cy="4572000"/>
+            <a:off x="7315200" y="1737360"/>
+            <a:ext cx="3962095" cy="4297680"/>
           </a:xfrm>
           <a:prstGeom prst="rect">
             <a:avLst/>
@@ -4376,274 +7147,126 @@
           <a:lstStyle/>
           <a:p>
             <a:pPr>
-              <a:defRPr sz="1700" b="1">
-                <a:solidFill>
-                  <a:srgbClr val="10B981"/>
-                </a:solidFill>
-              </a:defRPr>
-            </a:pPr>
-            <a:r>
-              <a:t>Ahorro Cuantificado y ROI Visible (+320%)</a:t>
-            </a:r>
-          </a:p>
-          <a:p>
-            <a:pPr>
               <a:defRPr sz="1200" b="1">
                 <a:solidFill>
-                  <a:srgbClr val="0A2540"/>
-                </a:solidFill>
-              </a:defRPr>
-            </a:pPr>
-            <a:r>
-              <a:t>★ Caminata Ahorrada por Operario: </a:t>
-            </a:r>
-            <a:r>
-              <a:rPr b="0"/>
-              <a:t>4.2 km de caminata menos al día por operario.</a:t>
-            </a:r>
-          </a:p>
-          <a:p>
-            <a:pPr>
-              <a:defRPr sz="1200" b="1">
-                <a:solidFill>
-                  <a:srgbClr val="0A2540"/>
-                </a:solidFill>
-              </a:defRPr>
-            </a:pPr>
-            <a:r>
-              <a:t>★ Tiempo Operativo Liberado: </a:t>
-            </a:r>
-            <a:r>
-              <a:rPr b="0"/>
-              <a:t>58 minutos ahorrados por operario al día (4,200m / 1.2m/s = 3,500s).</a:t>
-            </a:r>
-          </a:p>
-          <a:p>
-            <a:pPr>
-              <a:defRPr sz="1200" b="1">
-                <a:solidFill>
-                  <a:srgbClr val="0A2540"/>
-                </a:solidFill>
-              </a:defRPr>
-            </a:pPr>
-            <a:r>
-              <a:t>★ Ahorro Financiero por Almacén: </a:t>
-            </a:r>
-            <a:r>
-              <a:rPr b="0"/>
-              <a:t>S/ 28,000 anuales por centro de distribución (8 operarios × 58.3 min × 300 días × S/ 12/h).</a:t>
-            </a:r>
-          </a:p>
-          <a:p>
-            <a:pPr>
-              <a:defRPr sz="1200" b="1">
-                <a:solidFill>
-                  <a:srgbClr val="0A2540"/>
-                </a:solidFill>
-              </a:defRPr>
-            </a:pPr>
-            <a:r>
-              <a:t>★ Impacto en Red (10 Almacenes): </a:t>
-            </a:r>
-            <a:r>
-              <a:rPr b="0"/>
-              <a:t>S/ 280,000 anuales ahorrados en la red nacional.</a:t>
-            </a:r>
-          </a:p>
-          <a:p>
-            <a:pPr>
-              <a:defRPr sz="1200" b="1">
-                <a:solidFill>
-                  <a:srgbClr val="0A2540"/>
-                </a:solidFill>
-              </a:defRPr>
-            </a:pPr>
-            <a:r>
-              <a:t>★ Fórmula de ROI Demostrable: </a:t>
-            </a:r>
-            <a:r>
-              <a:rPr b="0"/>
-              <a:t>Inversión: S/ 6,600/almacén (S/ 66k red). ROI = (28,000 - 6,600)/6,600 = +321.8% (~+320%).</a:t>
-            </a:r>
-          </a:p>
-        </p:txBody>
-      </p:sp>
-    </p:spTree>
-  </p:cSld>
-  <p:clrMapOvr>
-    <a:masterClrMapping/>
-  </p:clrMapOvr>
-</p:sld>
-</file>
-
-<file path=ppt/slides/slide7.xml><?xml version="1.0" encoding="utf-8"?>
-<p:sld xmlns:a="http://schemas.openxmlformats.org/drawingml/2006/main" xmlns:p="http://schemas.openxmlformats.org/presentationml/2006/main" xmlns:r="http://schemas.openxmlformats.org/officeDocument/2006/relationships">
-  <p:cSld>
-    <p:spTree>
-      <p:nvGrpSpPr>
-        <p:cNvPr id="1" name=""/>
-        <p:cNvGrpSpPr/>
-        <p:nvPr/>
-      </p:nvGrpSpPr>
-      <p:grpSpPr/>
-      <p:sp>
-        <p:nvSpPr>
-          <p:cNvPr id="2" name="TextBox 1"/>
-          <p:cNvSpPr txBox="1"/>
-          <p:nvPr/>
-        </p:nvSpPr>
-        <p:spPr>
-          <a:xfrm>
-            <a:off x="731520" y="365760"/>
-            <a:ext cx="10698480" cy="1005840"/>
-          </a:xfrm>
-          <a:prstGeom prst="rect">
-            <a:avLst/>
-          </a:prstGeom>
-          <a:noFill/>
-        </p:spPr>
-        <p:txBody>
-          <a:bodyPr wrap="square">
-            <a:spAutoFit/>
-          </a:bodyPr>
-          <a:lstStyle/>
+                  <a:srgbClr val="1D4ED8"/>
+                </a:solidFill>
+              </a:defRPr>
+            </a:pPr>
+            <a:r>
+              <a:t>ROADMAP PARA LA FINAL: NTT DATA TOWER BLOOM</a:t>
+            </a:r>
+          </a:p>
+          <a:p>
+            <a:pPr>
+              <a:defRPr sz="1800" b="1">
+                <a:solidFill>
+                  <a:srgbClr val="0F172A"/>
+                </a:solidFill>
+              </a:defRPr>
+            </a:pPr>
+            <a:r>
+              <a:t>Escalamiento Inmediato a N = 14</a:t>
+            </a:r>
+          </a:p>
           <a:p>
             <a:pPr>
               <a:defRPr sz="1100" b="1">
                 <a:solidFill>
-                  <a:srgbClr val="00B4D8"/>
-                </a:solidFill>
-              </a:defRPr>
-            </a:pPr>
-            <a:r>
-              <a:t>NODUX • IBM QUANTUM HACKATHON 2026 | RETO NTT DATA</a:t>
-            </a:r>
-          </a:p>
-          <a:p>
-            <a:pPr>
-              <a:defRPr sz="2400" b="1">
-                <a:solidFill>
-                  <a:srgbClr val="0A2540"/>
-                </a:solidFill>
-              </a:defRPr>
-            </a:pPr>
-            <a:r>
-              <a:t>6. Demostración Interactiva, Reproducibilidad y Defensa (Nicolás López)</a:t>
-            </a:r>
-          </a:p>
-        </p:txBody>
-      </p:sp>
-      <p:sp>
-        <p:nvSpPr>
-          <p:cNvPr id="3" name="TextBox 2"/>
-          <p:cNvSpPr txBox="1"/>
-          <p:nvPr/>
-        </p:nvSpPr>
-        <p:spPr>
-          <a:xfrm>
-            <a:off x="731520" y="1554480"/>
-            <a:ext cx="10698480" cy="4754880"/>
-          </a:xfrm>
-          <a:prstGeom prst="rect">
-            <a:avLst/>
-          </a:prstGeom>
-          <a:noFill/>
-        </p:spPr>
-        <p:txBody>
-          <a:bodyPr wrap="square">
-            <a:spAutoFit/>
-          </a:bodyPr>
-          <a:lstStyle/>
-          <a:p>
-            <a:pPr>
-              <a:defRPr sz="1800" b="1">
-                <a:solidFill>
-                  <a:srgbClr val="0072CE"/>
-                </a:solidFill>
-              </a:defRPr>
-            </a:pPr>
-            <a:r>
-              <a:t>Cumplimiento del 100% de los Entregables y Reglas del Jurado</a:t>
-            </a:r>
-          </a:p>
-          <a:p>
-            <a:pPr>
-              <a:defRPr sz="1300" b="1">
-                <a:solidFill>
                   <a:srgbClr val="1E293B"/>
                 </a:solidFill>
               </a:defRPr>
             </a:pPr>
             <a:r>
-              <a:t>✔ Cockpit Oficial Ejecutivo en Vivo: </a:t>
-            </a:r>
-            <a:r>
-              <a:rPr b="0"/>
-              <a:t>Micro-API local en Flask (http://localhost:5000, latencia &lt; 50 ms) con visualización de asignación y Plan B Fail-Safe integrado.</a:t>
-            </a:r>
-          </a:p>
-          <a:p>
-            <a:pPr>
-              <a:defRPr sz="1300" b="1">
+              <a:t>✔ El Reto del Día 2: </a:t>
+            </a:r>
+            <a:r>
+              <a:rPr b="0">
+                <a:solidFill>
+                  <a:srgbClr val="64748B"/>
+                </a:solidFill>
+              </a:rPr>
+              <a:t>La instancia escala a N=14 (14! = 87,178,291,200 ≈ 87 mil millones de permutaciones).</a:t>
+            </a:r>
+          </a:p>
+          <a:p>
+            <a:pPr>
+              <a:defRPr sz="1100" b="1">
                 <a:solidFill>
                   <a:srgbClr val="1E293B"/>
                 </a:solidFill>
               </a:defRPr>
             </a:pPr>
             <a:r>
-              <a:t>✔ 100% Reproducibilidad en GitHub: </a:t>
-            </a:r>
-            <a:r>
-              <a:rPr b="0"/>
-              <a:t>Repositorio público (https://github.com/alex8v124/nodux-quantum.git) con requirements.txt y semillas fijas (seed=42).</a:t>
-            </a:r>
-          </a:p>
-          <a:p>
-            <a:pPr>
-              <a:defRPr sz="1300" b="1">
+              <a:t>✔ Por Qué los Monolíticos Fracasan: </a:t>
+            </a:r>
+            <a:r>
+              <a:rPr b="0">
+                <a:solidFill>
+                  <a:srgbClr val="64748B"/>
+                </a:solidFill>
+              </a:rPr>
+              <a:t>N=14 directo exigiría 14×14 = 196 cúbits (2¹⁹⁶ amplitudes ≈ 10⁶⁰ bytes). Ningún supercomputador del mundo puede simularlo.</a:t>
+            </a:r>
+          </a:p>
+          <a:p>
+            <a:pPr>
+              <a:defRPr sz="1100" b="1">
                 <a:solidFill>
                   <a:srgbClr val="1E293B"/>
                 </a:solidFill>
               </a:defRPr>
             </a:pPr>
             <a:r>
-              <a:t>✔ Sin Cuántica por Relleno ni QEC Innecesario: </a:t>
-            </a:r>
-            <a:r>
-              <a:rPr b="0"/>
-              <a:t>Respetamos las bases oficiales: cero códigos de corrección de error innecesarios y uso sustantivo de Qiskit 2.x en la optimización variacional.</a:t>
-            </a:r>
-          </a:p>
-          <a:p>
-            <a:pPr>
-              <a:defRPr sz="1300" b="1">
+              <a:t>✔ La Ventaja Arquitectónica de Q-LNS: </a:t>
+            </a:r>
+            <a:r>
+              <a:rPr b="0">
+                <a:solidFill>
+                  <a:srgbClr val="64748B"/>
+                </a:solidFill>
+              </a:rPr>
+              <a:t>Nuestra solución mantiene el núcleo cuántico acotado a 9–16 cúbits independientemente de que la planta tenga 10, 14 o 50 productos.</a:t>
+            </a:r>
+          </a:p>
+          <a:p>
+            <a:pPr>
+              <a:defRPr sz="1100" b="1">
                 <a:solidFill>
                   <a:srgbClr val="1E293B"/>
                 </a:solidFill>
               </a:defRPr>
             </a:pPr>
             <a:r>
-              <a:t>✔ Utilidad Metodológica Cuántica: </a:t>
-            </a:r>
-            <a:r>
-              <a:rPr b="0"/>
-              <a:t>Honestidad científica ante el jurado: demostramos un framework de descomposición escalable para NISQ con impacto económico medible (+320% ROI).</a:t>
-            </a:r>
-          </a:p>
-          <a:p>
-            <a:pPr>
-              <a:defRPr sz="1300" b="1">
+              <a:t>✔ Listo para Hardware NISQ: </a:t>
+            </a:r>
+            <a:r>
+              <a:rPr b="0">
+                <a:solidFill>
+                  <a:srgbClr val="64748B"/>
+                </a:solidFill>
+              </a:rPr>
+              <a:t>Ejecutable hoy en computadoras cuánticas ruidosas comerciales sin requerir tolerancia a fallos (FTQC).</a:t>
+            </a:r>
+          </a:p>
+          <a:p>
+            <a:pPr>
+              <a:defRPr sz="1100" b="1">
                 <a:solidFill>
                   <a:srgbClr val="1E293B"/>
                 </a:solidFill>
               </a:defRPr>
             </a:pPr>
             <a:r>
-              <a:t>✔ Compromiso Nodux: </a:t>
-            </a:r>
-            <a:r>
-              <a:rPr b="0"/>
-              <a:t>Demostramos viabilidad teórica y operativa para la final presencial del Día 2 en NTT DATA Tower Bloom.</a:t>
+              <a:t>✔ Compromiso Día 2: </a:t>
+            </a:r>
+            <a:r>
+              <a:rPr b="0">
+                <a:solidFill>
+                  <a:srgbClr val="64748B"/>
+                </a:solidFill>
+              </a:rPr>
+              <a:t>Despliegue de asignación en tiempo real en la sede NTT DATA Tower Bloom.</a:t>
             </a:r>
           </a:p>
         </p:txBody>
